--- a/public/lessons/year-6-maths/spring/week-16/convert-decimals-to-percentages/teaching-powerpoint-v1.pptx
+++ b/public/lessons/year-6-maths/spring/week-16/convert-decimals-to-percentages/teaching-powerpoint-v1.pptx
@@ -2,24 +2,24 @@
 <file path=ppt/presentation.xml><?xml version="1.0" encoding="utf-8"?>
 <p:presentation xmlns:p="http://schemas.openxmlformats.org/presentationml/2006/main">
   <p:sldMasterIdLst>
-    <p:sldMasterId xmlns:r="http://schemas.openxmlformats.org/officeDocument/2006/relationships" id="2147483648" r:id="Ra009442ee3214799"/>
+    <p:sldMasterId xmlns:r="http://schemas.openxmlformats.org/officeDocument/2006/relationships" id="2147483648" r:id="R7ca194b660734f9b"/>
   </p:sldMasterIdLst>
   <p:notesMasterIdLst>
-    <p:notesMasterId xmlns:r="http://schemas.openxmlformats.org/officeDocument/2006/relationships" r:id="R59914063a920404c"/>
+    <p:notesMasterId xmlns:r="http://schemas.openxmlformats.org/officeDocument/2006/relationships" r:id="Rcd07ac37f4154a4d"/>
   </p:notesMasterIdLst>
   <p:sldIdLst>
-    <p:sldId xmlns:r="http://schemas.openxmlformats.org/officeDocument/2006/relationships" id="256" r:id="R2efe2efed2f04523"/>
-    <p:sldId xmlns:r="http://schemas.openxmlformats.org/officeDocument/2006/relationships" id="257" r:id="Ra1fedce3e2c34981"/>
-    <p:sldId xmlns:r="http://schemas.openxmlformats.org/officeDocument/2006/relationships" id="258" r:id="Rbb92581e9b974dcb"/>
-    <p:sldId xmlns:r="http://schemas.openxmlformats.org/officeDocument/2006/relationships" id="259" r:id="R3b18a19dd0ac4952"/>
-    <p:sldId xmlns:r="http://schemas.openxmlformats.org/officeDocument/2006/relationships" id="260" r:id="Re038ea1db55c401d"/>
-    <p:sldId xmlns:r="http://schemas.openxmlformats.org/officeDocument/2006/relationships" id="261" r:id="R26249a93636c465e"/>
-    <p:sldId xmlns:r="http://schemas.openxmlformats.org/officeDocument/2006/relationships" id="262" r:id="R945d4bcec0314a7c"/>
-    <p:sldId xmlns:r="http://schemas.openxmlformats.org/officeDocument/2006/relationships" id="263" r:id="R47f85859c8f24b1f"/>
-    <p:sldId xmlns:r="http://schemas.openxmlformats.org/officeDocument/2006/relationships" id="264" r:id="R8ce77c8e2e124caa"/>
-    <p:sldId xmlns:r="http://schemas.openxmlformats.org/officeDocument/2006/relationships" id="265" r:id="R950ae2d1b08c4938"/>
-    <p:sldId xmlns:r="http://schemas.openxmlformats.org/officeDocument/2006/relationships" id="266" r:id="R73eb93b1db7b4a05"/>
-    <p:sldId xmlns:r="http://schemas.openxmlformats.org/officeDocument/2006/relationships" id="267" r:id="R9372b18a24d042dc"/>
+    <p:sldId xmlns:r="http://schemas.openxmlformats.org/officeDocument/2006/relationships" id="256" r:id="Raf3cb19787124351"/>
+    <p:sldId xmlns:r="http://schemas.openxmlformats.org/officeDocument/2006/relationships" id="257" r:id="Rfda8a7a9fa03428e"/>
+    <p:sldId xmlns:r="http://schemas.openxmlformats.org/officeDocument/2006/relationships" id="258" r:id="R0f5c8d36f4084c07"/>
+    <p:sldId xmlns:r="http://schemas.openxmlformats.org/officeDocument/2006/relationships" id="259" r:id="R01de6a547fa44989"/>
+    <p:sldId xmlns:r="http://schemas.openxmlformats.org/officeDocument/2006/relationships" id="260" r:id="R47e52a6b370c41fd"/>
+    <p:sldId xmlns:r="http://schemas.openxmlformats.org/officeDocument/2006/relationships" id="261" r:id="R60574071c6124740"/>
+    <p:sldId xmlns:r="http://schemas.openxmlformats.org/officeDocument/2006/relationships" id="262" r:id="R76485cdfe05d41ee"/>
+    <p:sldId xmlns:r="http://schemas.openxmlformats.org/officeDocument/2006/relationships" id="263" r:id="R3c92a70bcb574a6f"/>
+    <p:sldId xmlns:r="http://schemas.openxmlformats.org/officeDocument/2006/relationships" id="264" r:id="R8d8f33332da94461"/>
+    <p:sldId xmlns:r="http://schemas.openxmlformats.org/officeDocument/2006/relationships" id="265" r:id="R0e687b85a33e43c5"/>
+    <p:sldId xmlns:r="http://schemas.openxmlformats.org/officeDocument/2006/relationships" id="266" r:id="Raf75c7c51d294c9c"/>
+    <p:sldId xmlns:r="http://schemas.openxmlformats.org/officeDocument/2006/relationships" id="267" r:id="R4b0e4931ed3b472c"/>
   </p:sldIdLst>
   <p:sldSz cx="12192000" cy="6858000"/>
   <p:notesSz cx="6858000" cy="9144000"/>
@@ -873,7 +873,7 @@
           <a:lstStyle xmlns:a="http://schemas.openxmlformats.org/drawingml/2006/main"/>
           <a:p xmlns:a="http://schemas.openxmlformats.org/drawingml/2006/main">
             <a:r>
-              <a:t>I do. Reveal the question, setup and each calculation stage one click at a time. Pupils watch before copying. Model answer: 62.5%.</a:t>
+              <a:t>I do. Reveal the question, then reveal each mathematical change one click at a time. Point to the numbers and operation that changed before moving to the next line. Final answer: 62.5%.</a:t>
             </a:r>
           </a:p>
         </p:txBody>
@@ -1291,7 +1291,7 @@
   </p:cSld>
   <p:clrMap bg1="lt1" tx1="dk1" bg2="lt2" tx2="dk2" accent1="accent1" accent2="accent2" accent3="accent3" accent4="accent4" accent5="accent5" accent6="accent6" hlink="hlink" folHlink="folHlink"/>
   <p:sldLayoutIdLst>
-    <p:sldLayoutId xmlns:r="http://schemas.openxmlformats.org/officeDocument/2006/relationships" id="2147483649" r:id="R343b30290a484aa3"/>
+    <p:sldLayoutId xmlns:r="http://schemas.openxmlformats.org/officeDocument/2006/relationships" id="2147483649" r:id="R0060e0822afd4d3b"/>
   </p:sldLayoutIdLst>
   <p:txStyles>
     <p:titleStyle>
@@ -1842,7 +1842,7 @@
           <p:cNvPr id="12" name="">
             <a:extLst xmlns:a="http://schemas.openxmlformats.org/drawingml/2006/main">
               <a:ext uri="{FF2B5EF4-FFF2-40B4-BE49-F238E27FC236}">
-                <a16:creationId xmlns:a16="http://schemas.microsoft.com/office/drawing/2014/main" id="{9BA62C4A-2CF1-405D-9FA6-D5588366E0D3}"/>
+                <a16:creationId xmlns:a16="http://schemas.microsoft.com/office/drawing/2014/main" id="{BC1E86AA-45E0-4582-B3A8-73B9342BD83D}"/>
               </a:ext>
             </a:extLst>
           </p:cNvPr>
@@ -1874,7 +1874,7 @@
           <p:cNvPr id="2" name="">
             <a:extLst xmlns:a="http://schemas.openxmlformats.org/drawingml/2006/main">
               <a:ext uri="{FF2B5EF4-FFF2-40B4-BE49-F238E27FC236}">
-                <a16:creationId xmlns:a16="http://schemas.microsoft.com/office/drawing/2014/main" id="{D0BB74FD-7AA8-462A-A988-52A7DD649F97}"/>
+                <a16:creationId xmlns:a16="http://schemas.microsoft.com/office/drawing/2014/main" id="{7F80AD51-B98F-4278-A411-44357486A034}"/>
               </a:ext>
             </a:extLst>
           </p:cNvPr>
@@ -1931,7 +1931,7 @@
           <p:cNvPr id="3" name="">
             <a:extLst xmlns:a="http://schemas.openxmlformats.org/drawingml/2006/main">
               <a:ext uri="{FF2B5EF4-FFF2-40B4-BE49-F238E27FC236}">
-                <a16:creationId xmlns:a16="http://schemas.microsoft.com/office/drawing/2014/main" id="{0B2F48B5-DA9D-4ABE-ABCA-7105CB1A3238}"/>
+                <a16:creationId xmlns:a16="http://schemas.microsoft.com/office/drawing/2014/main" id="{2427E047-41C4-4530-9568-C0A9DD257A86}"/>
               </a:ext>
             </a:extLst>
           </p:cNvPr>
@@ -1965,7 +1965,7 @@
           <p:cNvPr id="4" name="">
             <a:extLst xmlns:a="http://schemas.openxmlformats.org/drawingml/2006/main">
               <a:ext uri="{FF2B5EF4-FFF2-40B4-BE49-F238E27FC236}">
-                <a16:creationId xmlns:a16="http://schemas.microsoft.com/office/drawing/2014/main" id="{B789DA88-71F6-4706-8224-FC25C227F2DF}"/>
+                <a16:creationId xmlns:a16="http://schemas.microsoft.com/office/drawing/2014/main" id="{F37ED4F0-4CB1-40BD-AE63-21D247886C58}"/>
               </a:ext>
             </a:extLst>
           </p:cNvPr>
@@ -2022,7 +2022,7 @@
           <p:cNvPr id="5" name="">
             <a:extLst xmlns:a="http://schemas.openxmlformats.org/drawingml/2006/main">
               <a:ext uri="{FF2B5EF4-FFF2-40B4-BE49-F238E27FC236}">
-                <a16:creationId xmlns:a16="http://schemas.microsoft.com/office/drawing/2014/main" id="{7B6864F7-782E-4128-9A9A-467903854ED2}"/>
+                <a16:creationId xmlns:a16="http://schemas.microsoft.com/office/drawing/2014/main" id="{C52BF969-23B8-4639-8F97-B2F865DF9664}"/>
               </a:ext>
             </a:extLst>
           </p:cNvPr>
@@ -2079,7 +2079,7 @@
           <p:cNvPr id="6" name="">
             <a:extLst xmlns:a="http://schemas.openxmlformats.org/drawingml/2006/main">
               <a:ext uri="{FF2B5EF4-FFF2-40B4-BE49-F238E27FC236}">
-                <a16:creationId xmlns:a16="http://schemas.microsoft.com/office/drawing/2014/main" id="{65E6AE72-F302-4887-AA1D-0F2FBA5D6DEC}"/>
+                <a16:creationId xmlns:a16="http://schemas.microsoft.com/office/drawing/2014/main" id="{F4822E8F-B028-4961-B54D-E70FDC04094E}"/>
               </a:ext>
             </a:extLst>
           </p:cNvPr>
@@ -2113,7 +2113,7 @@
           <p:cNvPr id="7" name="">
             <a:extLst xmlns:a="http://schemas.openxmlformats.org/drawingml/2006/main">
               <a:ext uri="{FF2B5EF4-FFF2-40B4-BE49-F238E27FC236}">
-                <a16:creationId xmlns:a16="http://schemas.microsoft.com/office/drawing/2014/main" id="{EA098ABC-EA91-476D-BA10-1F54C119E0C4}"/>
+                <a16:creationId xmlns:a16="http://schemas.microsoft.com/office/drawing/2014/main" id="{405BF3AA-6A4D-47DA-8D7F-13334B0AD6CE}"/>
               </a:ext>
             </a:extLst>
           </p:cNvPr>
@@ -2170,7 +2170,7 @@
           <p:cNvPr id="8" name="">
             <a:extLst xmlns:a="http://schemas.openxmlformats.org/drawingml/2006/main">
               <a:ext uri="{FF2B5EF4-FFF2-40B4-BE49-F238E27FC236}">
-                <a16:creationId xmlns:a16="http://schemas.microsoft.com/office/drawing/2014/main" id="{8FA1FF11-FBF1-4518-B906-9CB6E45053C0}"/>
+                <a16:creationId xmlns:a16="http://schemas.microsoft.com/office/drawing/2014/main" id="{0432E6DD-0273-43E7-85CA-38CD7C244576}"/>
               </a:ext>
             </a:extLst>
           </p:cNvPr>
@@ -2227,7 +2227,7 @@
           <p:cNvPr id="9" name="">
             <a:extLst xmlns:a="http://schemas.openxmlformats.org/drawingml/2006/main">
               <a:ext uri="{FF2B5EF4-FFF2-40B4-BE49-F238E27FC236}">
-                <a16:creationId xmlns:a16="http://schemas.microsoft.com/office/drawing/2014/main" id="{02A8485E-8593-4338-BC09-0CA0FE8B82E0}"/>
+                <a16:creationId xmlns:a16="http://schemas.microsoft.com/office/drawing/2014/main" id="{19C44EF0-687F-45F6-8B21-FBBC4B1DDCF5}"/>
               </a:ext>
             </a:extLst>
           </p:cNvPr>
@@ -2284,7 +2284,7 @@
           <p:cNvPr id="10" name="">
             <a:extLst xmlns:a="http://schemas.openxmlformats.org/drawingml/2006/main">
               <a:ext uri="{FF2B5EF4-FFF2-40B4-BE49-F238E27FC236}">
-                <a16:creationId xmlns:a16="http://schemas.microsoft.com/office/drawing/2014/main" id="{E549385D-5410-4900-8007-2633283919CE}"/>
+                <a16:creationId xmlns:a16="http://schemas.microsoft.com/office/drawing/2014/main" id="{96A74B18-C4F9-41B5-828A-5F7AB08C4E0D}"/>
               </a:ext>
             </a:extLst>
           </p:cNvPr>
@@ -2341,7 +2341,7 @@
           <p:cNvPr id="11" name="">
             <a:extLst xmlns:a="http://schemas.openxmlformats.org/drawingml/2006/main">
               <a:ext uri="{FF2B5EF4-FFF2-40B4-BE49-F238E27FC236}">
-                <a16:creationId xmlns:a16="http://schemas.microsoft.com/office/drawing/2014/main" id="{84199F9F-1953-4841-A82A-849DD995DA8C}"/>
+                <a16:creationId xmlns:a16="http://schemas.microsoft.com/office/drawing/2014/main" id="{4759DD2B-B85C-42F3-A5BA-3D78D8D67A0C}"/>
               </a:ext>
             </a:extLst>
           </p:cNvPr>
@@ -2396,7 +2396,7 @@
     </p:spTree>
     <p:extLst>
       <p:ext uri="{BB962C8B-B14F-4D97-AF65-F5344CB8AC3E}">
-        <p14:creationId xmlns:p14="http://schemas.microsoft.com/office/powerpoint/2010/main" val="1835815654"/>
+        <p14:creationId xmlns:p14="http://schemas.microsoft.com/office/powerpoint/2010/main" val="1834226260"/>
       </p:ext>
     </p:extLst>
   </p:cSld>
@@ -2427,7 +2427,7 @@
           <p:cNvPr id="14" name="">
             <a:extLst xmlns:a="http://schemas.openxmlformats.org/drawingml/2006/main">
               <a:ext uri="{FF2B5EF4-FFF2-40B4-BE49-F238E27FC236}">
-                <a16:creationId xmlns:a16="http://schemas.microsoft.com/office/drawing/2014/main" id="{F41E809E-211B-4951-8096-D27A6BA98186}"/>
+                <a16:creationId xmlns:a16="http://schemas.microsoft.com/office/drawing/2014/main" id="{E0C6B165-7695-42EF-961B-AE5807024BFD}"/>
               </a:ext>
             </a:extLst>
           </p:cNvPr>
@@ -2459,7 +2459,7 @@
           <p:cNvPr id="2" name="">
             <a:extLst xmlns:a="http://schemas.openxmlformats.org/drawingml/2006/main">
               <a:ext uri="{FF2B5EF4-FFF2-40B4-BE49-F238E27FC236}">
-                <a16:creationId xmlns:a16="http://schemas.microsoft.com/office/drawing/2014/main" id="{FF4AADB6-CE99-45DB-86CA-6CE6ED8440FF}"/>
+                <a16:creationId xmlns:a16="http://schemas.microsoft.com/office/drawing/2014/main" id="{70D9343F-48BB-4B82-BA91-BF2535B7A6A4}"/>
               </a:ext>
             </a:extLst>
           </p:cNvPr>
@@ -2516,7 +2516,7 @@
           <p:cNvPr id="3" name="">
             <a:extLst xmlns:a="http://schemas.openxmlformats.org/drawingml/2006/main">
               <a:ext uri="{FF2B5EF4-FFF2-40B4-BE49-F238E27FC236}">
-                <a16:creationId xmlns:a16="http://schemas.microsoft.com/office/drawing/2014/main" id="{108055AF-5802-44C4-A939-AF491858E336}"/>
+                <a16:creationId xmlns:a16="http://schemas.microsoft.com/office/drawing/2014/main" id="{A9CAC308-D147-4C1D-883F-50A1BF9CC25F}"/>
               </a:ext>
             </a:extLst>
           </p:cNvPr>
@@ -2548,7 +2548,7 @@
           <p:cNvPr id="4" name="">
             <a:extLst xmlns:a="http://schemas.openxmlformats.org/drawingml/2006/main">
               <a:ext uri="{FF2B5EF4-FFF2-40B4-BE49-F238E27FC236}">
-                <a16:creationId xmlns:a16="http://schemas.microsoft.com/office/drawing/2014/main" id="{107C789A-F133-4A1C-B39F-7CDFB0B98688}"/>
+                <a16:creationId xmlns:a16="http://schemas.microsoft.com/office/drawing/2014/main" id="{47305CB3-215A-420B-A28E-CAEE12EFF4B9}"/>
               </a:ext>
             </a:extLst>
           </p:cNvPr>
@@ -2605,7 +2605,7 @@
           <p:cNvPr id="5" name="">
             <a:extLst xmlns:a="http://schemas.openxmlformats.org/drawingml/2006/main">
               <a:ext uri="{FF2B5EF4-FFF2-40B4-BE49-F238E27FC236}">
-                <a16:creationId xmlns:a16="http://schemas.microsoft.com/office/drawing/2014/main" id="{B10CCCD4-2710-4E82-ACFA-171BA366388B}"/>
+                <a16:creationId xmlns:a16="http://schemas.microsoft.com/office/drawing/2014/main" id="{C23028D9-614A-4FDD-BFEA-3C9F93C15A1C}"/>
               </a:ext>
             </a:extLst>
           </p:cNvPr>
@@ -2662,7 +2662,7 @@
           <p:cNvPr id="6" name="">
             <a:extLst xmlns:a="http://schemas.openxmlformats.org/drawingml/2006/main">
               <a:ext uri="{FF2B5EF4-FFF2-40B4-BE49-F238E27FC236}">
-                <a16:creationId xmlns:a16="http://schemas.microsoft.com/office/drawing/2014/main" id="{ADE322B7-8F11-4C52-8FC8-6274C8223A7F}"/>
+                <a16:creationId xmlns:a16="http://schemas.microsoft.com/office/drawing/2014/main" id="{A89F5AA2-7947-4494-BD1F-CEEF56EDD459}"/>
               </a:ext>
             </a:extLst>
           </p:cNvPr>
@@ -2719,7 +2719,7 @@
           <p:cNvPr id="7" name="">
             <a:extLst xmlns:a="http://schemas.openxmlformats.org/drawingml/2006/main">
               <a:ext uri="{FF2B5EF4-FFF2-40B4-BE49-F238E27FC236}">
-                <a16:creationId xmlns:a16="http://schemas.microsoft.com/office/drawing/2014/main" id="{9E2A10A4-D909-477C-AA58-2F1C2AA1625C}"/>
+                <a16:creationId xmlns:a16="http://schemas.microsoft.com/office/drawing/2014/main" id="{1CA07BEB-8F69-406C-96FC-AE6FB4AAFF8D}"/>
               </a:ext>
             </a:extLst>
           </p:cNvPr>
@@ -2751,7 +2751,7 @@
           <p:cNvPr id="8" name="">
             <a:extLst xmlns:a="http://schemas.openxmlformats.org/drawingml/2006/main">
               <a:ext uri="{FF2B5EF4-FFF2-40B4-BE49-F238E27FC236}">
-                <a16:creationId xmlns:a16="http://schemas.microsoft.com/office/drawing/2014/main" id="{ABBABB24-2CA1-4B7C-B381-AD6FF96071EE}"/>
+                <a16:creationId xmlns:a16="http://schemas.microsoft.com/office/drawing/2014/main" id="{B776E03F-10F7-4328-B0C4-0964D4082252}"/>
               </a:ext>
             </a:extLst>
           </p:cNvPr>
@@ -2808,7 +2808,7 @@
           <p:cNvPr id="9" name="">
             <a:extLst xmlns:a="http://schemas.openxmlformats.org/drawingml/2006/main">
               <a:ext uri="{FF2B5EF4-FFF2-40B4-BE49-F238E27FC236}">
-                <a16:creationId xmlns:a16="http://schemas.microsoft.com/office/drawing/2014/main" id="{57A8B42B-5C5E-44EF-B28D-2F0CF7CC8C1B}"/>
+                <a16:creationId xmlns:a16="http://schemas.microsoft.com/office/drawing/2014/main" id="{AA568C2F-95DE-47CB-83F7-28FAEA0C758E}"/>
               </a:ext>
             </a:extLst>
           </p:cNvPr>
@@ -2865,7 +2865,7 @@
           <p:cNvPr id="10" name="">
             <a:extLst xmlns:a="http://schemas.openxmlformats.org/drawingml/2006/main">
               <a:ext uri="{FF2B5EF4-FFF2-40B4-BE49-F238E27FC236}">
-                <a16:creationId xmlns:a16="http://schemas.microsoft.com/office/drawing/2014/main" id="{A7AB9D0B-78FC-4E0A-B22D-B3EE90CF5FF7}"/>
+                <a16:creationId xmlns:a16="http://schemas.microsoft.com/office/drawing/2014/main" id="{9D0E6321-8809-480A-91B6-3054AD92E466}"/>
               </a:ext>
             </a:extLst>
           </p:cNvPr>
@@ -2922,7 +2922,7 @@
           <p:cNvPr id="11" name="">
             <a:extLst xmlns:a="http://schemas.openxmlformats.org/drawingml/2006/main">
               <a:ext uri="{FF2B5EF4-FFF2-40B4-BE49-F238E27FC236}">
-                <a16:creationId xmlns:a16="http://schemas.microsoft.com/office/drawing/2014/main" id="{500EDD95-3206-4567-8F05-918D1CD4F39F}"/>
+                <a16:creationId xmlns:a16="http://schemas.microsoft.com/office/drawing/2014/main" id="{8B04AB92-CA5C-4800-8B0A-AB40A9B23F02}"/>
               </a:ext>
             </a:extLst>
           </p:cNvPr>
@@ -2979,7 +2979,7 @@
           <p:cNvPr id="12" name="">
             <a:extLst xmlns:a="http://schemas.openxmlformats.org/drawingml/2006/main">
               <a:ext uri="{FF2B5EF4-FFF2-40B4-BE49-F238E27FC236}">
-                <a16:creationId xmlns:a16="http://schemas.microsoft.com/office/drawing/2014/main" id="{8D495E5D-05B0-41B1-A9A9-67D77F239667}"/>
+                <a16:creationId xmlns:a16="http://schemas.microsoft.com/office/drawing/2014/main" id="{6E474B3B-844B-4614-ADCC-2F446E4BD35A}"/>
               </a:ext>
             </a:extLst>
           </p:cNvPr>
@@ -3036,7 +3036,7 @@
           <p:cNvPr id="13" name="">
             <a:extLst xmlns:a="http://schemas.openxmlformats.org/drawingml/2006/main">
               <a:ext uri="{FF2B5EF4-FFF2-40B4-BE49-F238E27FC236}">
-                <a16:creationId xmlns:a16="http://schemas.microsoft.com/office/drawing/2014/main" id="{75538A86-9C07-40CA-8B65-5F1EC8AC71D5}"/>
+                <a16:creationId xmlns:a16="http://schemas.microsoft.com/office/drawing/2014/main" id="{3DD201B7-34F2-42D9-A11B-25DACE3BC60E}"/>
               </a:ext>
             </a:extLst>
           </p:cNvPr>
@@ -3091,7 +3091,7 @@
     </p:spTree>
     <p:extLst>
       <p:ext uri="{BB962C8B-B14F-4D97-AF65-F5344CB8AC3E}">
-        <p14:creationId xmlns:p14="http://schemas.microsoft.com/office/powerpoint/2010/main" val="1447638748"/>
+        <p14:creationId xmlns:p14="http://schemas.microsoft.com/office/powerpoint/2010/main" val="2022786025"/>
       </p:ext>
     </p:extLst>
   </p:cSld>
@@ -3292,7 +3292,7 @@
           <p:cNvPr id="19" name="">
             <a:extLst xmlns:a="http://schemas.openxmlformats.org/drawingml/2006/main">
               <a:ext uri="{FF2B5EF4-FFF2-40B4-BE49-F238E27FC236}">
-                <a16:creationId xmlns:a16="http://schemas.microsoft.com/office/drawing/2014/main" id="{6A73F806-81C0-425B-A9ED-E9495EC91910}"/>
+                <a16:creationId xmlns:a16="http://schemas.microsoft.com/office/drawing/2014/main" id="{E46877A4-5974-4D81-BD20-4790B0C15C42}"/>
               </a:ext>
             </a:extLst>
           </p:cNvPr>
@@ -3324,7 +3324,7 @@
           <p:cNvPr id="2" name="">
             <a:extLst xmlns:a="http://schemas.openxmlformats.org/drawingml/2006/main">
               <a:ext uri="{FF2B5EF4-FFF2-40B4-BE49-F238E27FC236}">
-                <a16:creationId xmlns:a16="http://schemas.microsoft.com/office/drawing/2014/main" id="{075087A9-35D5-4945-A335-6ABB29977019}"/>
+                <a16:creationId xmlns:a16="http://schemas.microsoft.com/office/drawing/2014/main" id="{42AD4004-09B7-4689-801A-649C76FF6BE0}"/>
               </a:ext>
             </a:extLst>
           </p:cNvPr>
@@ -3381,7 +3381,7 @@
           <p:cNvPr id="3" name="">
             <a:extLst xmlns:a="http://schemas.openxmlformats.org/drawingml/2006/main">
               <a:ext uri="{FF2B5EF4-FFF2-40B4-BE49-F238E27FC236}">
-                <a16:creationId xmlns:a16="http://schemas.microsoft.com/office/drawing/2014/main" id="{3A8C7210-BF46-4C4F-974F-6FBC183990C0}"/>
+                <a16:creationId xmlns:a16="http://schemas.microsoft.com/office/drawing/2014/main" id="{AA9AE2D8-B739-49FD-AC2E-F48EAE4E10AB}"/>
               </a:ext>
             </a:extLst>
           </p:cNvPr>
@@ -3413,7 +3413,7 @@
           <p:cNvPr id="4" name="">
             <a:extLst xmlns:a="http://schemas.openxmlformats.org/drawingml/2006/main">
               <a:ext uri="{FF2B5EF4-FFF2-40B4-BE49-F238E27FC236}">
-                <a16:creationId xmlns:a16="http://schemas.microsoft.com/office/drawing/2014/main" id="{8D6A9103-D052-446A-BEC6-8B54E14209EA}"/>
+                <a16:creationId xmlns:a16="http://schemas.microsoft.com/office/drawing/2014/main" id="{43F8438F-5466-4C2C-ABA3-FDA832A71117}"/>
               </a:ext>
             </a:extLst>
           </p:cNvPr>
@@ -3470,7 +3470,7 @@
           <p:cNvPr id="5" name="">
             <a:extLst xmlns:a="http://schemas.openxmlformats.org/drawingml/2006/main">
               <a:ext uri="{FF2B5EF4-FFF2-40B4-BE49-F238E27FC236}">
-                <a16:creationId xmlns:a16="http://schemas.microsoft.com/office/drawing/2014/main" id="{C67C3695-2230-449A-BFB0-8206B7258856}"/>
+                <a16:creationId xmlns:a16="http://schemas.microsoft.com/office/drawing/2014/main" id="{6C83F7F5-6974-442B-9352-7C3A60A34F86}"/>
               </a:ext>
             </a:extLst>
           </p:cNvPr>
@@ -3527,7 +3527,7 @@
           <p:cNvPr id="6" name="">
             <a:extLst xmlns:a="http://schemas.openxmlformats.org/drawingml/2006/main">
               <a:ext uri="{FF2B5EF4-FFF2-40B4-BE49-F238E27FC236}">
-                <a16:creationId xmlns:a16="http://schemas.microsoft.com/office/drawing/2014/main" id="{FA2E80F6-3090-459D-99D6-75474FFA9A5F}"/>
+                <a16:creationId xmlns:a16="http://schemas.microsoft.com/office/drawing/2014/main" id="{4C26501D-45EE-49EA-B0A5-96AA211BBF3C}"/>
               </a:ext>
             </a:extLst>
           </p:cNvPr>
@@ -3584,7 +3584,7 @@
           <p:cNvPr id="7" name="">
             <a:extLst xmlns:a="http://schemas.openxmlformats.org/drawingml/2006/main">
               <a:ext uri="{FF2B5EF4-FFF2-40B4-BE49-F238E27FC236}">
-                <a16:creationId xmlns:a16="http://schemas.microsoft.com/office/drawing/2014/main" id="{0AF2B9D6-99D4-4210-90A3-4F2B4B2E7867}"/>
+                <a16:creationId xmlns:a16="http://schemas.microsoft.com/office/drawing/2014/main" id="{19BBA014-9267-431E-8A13-2B1895EEE90B}"/>
               </a:ext>
             </a:extLst>
           </p:cNvPr>
@@ -3616,7 +3616,7 @@
           <p:cNvPr id="8" name="">
             <a:extLst xmlns:a="http://schemas.openxmlformats.org/drawingml/2006/main">
               <a:ext uri="{FF2B5EF4-FFF2-40B4-BE49-F238E27FC236}">
-                <a16:creationId xmlns:a16="http://schemas.microsoft.com/office/drawing/2014/main" id="{ECF34BAD-65CB-423F-A61D-94497FD9FD52}"/>
+                <a16:creationId xmlns:a16="http://schemas.microsoft.com/office/drawing/2014/main" id="{318C2153-6907-4E41-BF2E-0A867D53898C}"/>
               </a:ext>
             </a:extLst>
           </p:cNvPr>
@@ -3673,7 +3673,7 @@
           <p:cNvPr id="9" name="">
             <a:extLst xmlns:a="http://schemas.openxmlformats.org/drawingml/2006/main">
               <a:ext uri="{FF2B5EF4-FFF2-40B4-BE49-F238E27FC236}">
-                <a16:creationId xmlns:a16="http://schemas.microsoft.com/office/drawing/2014/main" id="{E241BF1A-4E14-46B0-A47D-0AC5E63E522B}"/>
+                <a16:creationId xmlns:a16="http://schemas.microsoft.com/office/drawing/2014/main" id="{2401A1C6-0FEC-4F78-8754-EC00C40C3D06}"/>
               </a:ext>
             </a:extLst>
           </p:cNvPr>
@@ -3730,7 +3730,7 @@
           <p:cNvPr id="10" name="">
             <a:extLst xmlns:a="http://schemas.openxmlformats.org/drawingml/2006/main">
               <a:ext uri="{FF2B5EF4-FFF2-40B4-BE49-F238E27FC236}">
-                <a16:creationId xmlns:a16="http://schemas.microsoft.com/office/drawing/2014/main" id="{65F2ACAD-73A5-4F05-B551-42E8687ADD23}"/>
+                <a16:creationId xmlns:a16="http://schemas.microsoft.com/office/drawing/2014/main" id="{9786DE98-92E0-4FC3-BEE0-F576B20442C1}"/>
               </a:ext>
             </a:extLst>
           </p:cNvPr>
@@ -3787,7 +3787,7 @@
           <p:cNvPr id="11" name="">
             <a:extLst xmlns:a="http://schemas.openxmlformats.org/drawingml/2006/main">
               <a:ext uri="{FF2B5EF4-FFF2-40B4-BE49-F238E27FC236}">
-                <a16:creationId xmlns:a16="http://schemas.microsoft.com/office/drawing/2014/main" id="{EDBCB57D-C4E3-4386-8321-06636F279846}"/>
+                <a16:creationId xmlns:a16="http://schemas.microsoft.com/office/drawing/2014/main" id="{027BB3A4-F9EA-4A0D-BEC4-BA19F29AEA3A}"/>
               </a:ext>
             </a:extLst>
           </p:cNvPr>
@@ -3821,7 +3821,7 @@
           <p:cNvPr id="12" name="">
             <a:extLst xmlns:a="http://schemas.openxmlformats.org/drawingml/2006/main">
               <a:ext uri="{FF2B5EF4-FFF2-40B4-BE49-F238E27FC236}">
-                <a16:creationId xmlns:a16="http://schemas.microsoft.com/office/drawing/2014/main" id="{DB8D7001-A64E-46FE-8B23-4C3666565532}"/>
+                <a16:creationId xmlns:a16="http://schemas.microsoft.com/office/drawing/2014/main" id="{572809B1-46FE-4E72-AD2F-AE1BAB62D888}"/>
               </a:ext>
             </a:extLst>
           </p:cNvPr>
@@ -3878,7 +3878,7 @@
           <p:cNvPr id="13" name="">
             <a:extLst xmlns:a="http://schemas.openxmlformats.org/drawingml/2006/main">
               <a:ext uri="{FF2B5EF4-FFF2-40B4-BE49-F238E27FC236}">
-                <a16:creationId xmlns:a16="http://schemas.microsoft.com/office/drawing/2014/main" id="{CF113943-DA8F-4FEE-AE2F-AAB490B2EDE5}"/>
+                <a16:creationId xmlns:a16="http://schemas.microsoft.com/office/drawing/2014/main" id="{DC3F72AF-EFA7-49FE-9C71-A9A6E4015F56}"/>
               </a:ext>
             </a:extLst>
           </p:cNvPr>
@@ -3935,7 +3935,7 @@
           <p:cNvPr id="14" name="">
             <a:extLst xmlns:a="http://schemas.openxmlformats.org/drawingml/2006/main">
               <a:ext uri="{FF2B5EF4-FFF2-40B4-BE49-F238E27FC236}">
-                <a16:creationId xmlns:a16="http://schemas.microsoft.com/office/drawing/2014/main" id="{F7CD5A10-2891-41F7-8B90-4C6C7C16154B}"/>
+                <a16:creationId xmlns:a16="http://schemas.microsoft.com/office/drawing/2014/main" id="{722BACDC-4BA5-45F3-BA23-BF2928FC0EB9}"/>
               </a:ext>
             </a:extLst>
           </p:cNvPr>
@@ -3992,7 +3992,7 @@
           <p:cNvPr id="15" name="">
             <a:extLst xmlns:a="http://schemas.openxmlformats.org/drawingml/2006/main">
               <a:ext uri="{FF2B5EF4-FFF2-40B4-BE49-F238E27FC236}">
-                <a16:creationId xmlns:a16="http://schemas.microsoft.com/office/drawing/2014/main" id="{58CE9859-6408-4A76-A707-3BDD88F48D6C}"/>
+                <a16:creationId xmlns:a16="http://schemas.microsoft.com/office/drawing/2014/main" id="{51E6376C-BCA1-4806-9050-5A1139D76EE2}"/>
               </a:ext>
             </a:extLst>
           </p:cNvPr>
@@ -4026,7 +4026,7 @@
           <p:cNvPr id="16" name="">
             <a:extLst xmlns:a="http://schemas.openxmlformats.org/drawingml/2006/main">
               <a:ext uri="{FF2B5EF4-FFF2-40B4-BE49-F238E27FC236}">
-                <a16:creationId xmlns:a16="http://schemas.microsoft.com/office/drawing/2014/main" id="{08BE9563-88B2-46FC-9033-0CEF4A3369F7}"/>
+                <a16:creationId xmlns:a16="http://schemas.microsoft.com/office/drawing/2014/main" id="{A8B2E09B-EADC-481E-99C4-EFDC5E71160C}"/>
               </a:ext>
             </a:extLst>
           </p:cNvPr>
@@ -4083,7 +4083,7 @@
           <p:cNvPr id="17" name="">
             <a:extLst xmlns:a="http://schemas.openxmlformats.org/drawingml/2006/main">
               <a:ext uri="{FF2B5EF4-FFF2-40B4-BE49-F238E27FC236}">
-                <a16:creationId xmlns:a16="http://schemas.microsoft.com/office/drawing/2014/main" id="{B62373B2-EFC6-44AB-A997-B0BC08180699}"/>
+                <a16:creationId xmlns:a16="http://schemas.microsoft.com/office/drawing/2014/main" id="{B8A217E8-072F-4709-B08D-B62802F2B843}"/>
               </a:ext>
             </a:extLst>
           </p:cNvPr>
@@ -4140,7 +4140,7 @@
           <p:cNvPr id="18" name="">
             <a:extLst xmlns:a="http://schemas.openxmlformats.org/drawingml/2006/main">
               <a:ext uri="{FF2B5EF4-FFF2-40B4-BE49-F238E27FC236}">
-                <a16:creationId xmlns:a16="http://schemas.microsoft.com/office/drawing/2014/main" id="{C22C2FDD-074A-4DD4-B0CC-6249FD86E08D}"/>
+                <a16:creationId xmlns:a16="http://schemas.microsoft.com/office/drawing/2014/main" id="{00F2557A-ED82-4E55-A780-3200EFDF8821}"/>
               </a:ext>
             </a:extLst>
           </p:cNvPr>
@@ -4195,7 +4195,7 @@
     </p:spTree>
     <p:extLst>
       <p:ext uri="{BB962C8B-B14F-4D97-AF65-F5344CB8AC3E}">
-        <p14:creationId xmlns:p14="http://schemas.microsoft.com/office/powerpoint/2010/main" val="262745486"/>
+        <p14:creationId xmlns:p14="http://schemas.microsoft.com/office/powerpoint/2010/main" val="224320068"/>
       </p:ext>
     </p:extLst>
   </p:cSld>
@@ -4350,7 +4350,7 @@
           <p:cNvPr id="23" name="">
             <a:extLst xmlns:a="http://schemas.openxmlformats.org/drawingml/2006/main">
               <a:ext uri="{FF2B5EF4-FFF2-40B4-BE49-F238E27FC236}">
-                <a16:creationId xmlns:a16="http://schemas.microsoft.com/office/drawing/2014/main" id="{C945E11C-E92D-4DDF-BF52-F5C8C958141F}"/>
+                <a16:creationId xmlns:a16="http://schemas.microsoft.com/office/drawing/2014/main" id="{C9FC9D87-A341-4F3B-BC7B-2ECA00D0EB70}"/>
               </a:ext>
             </a:extLst>
           </p:cNvPr>
@@ -4382,7 +4382,7 @@
           <p:cNvPr id="2" name="">
             <a:extLst xmlns:a="http://schemas.openxmlformats.org/drawingml/2006/main">
               <a:ext uri="{FF2B5EF4-FFF2-40B4-BE49-F238E27FC236}">
-                <a16:creationId xmlns:a16="http://schemas.microsoft.com/office/drawing/2014/main" id="{FBAB6480-B65B-4DC3-971F-CFE4A9859156}"/>
+                <a16:creationId xmlns:a16="http://schemas.microsoft.com/office/drawing/2014/main" id="{4A167A08-FDC5-4317-B8BA-6C6D8B5D59D6}"/>
               </a:ext>
             </a:extLst>
           </p:cNvPr>
@@ -4439,7 +4439,7 @@
           <p:cNvPr id="3" name="">
             <a:extLst xmlns:a="http://schemas.openxmlformats.org/drawingml/2006/main">
               <a:ext uri="{FF2B5EF4-FFF2-40B4-BE49-F238E27FC236}">
-                <a16:creationId xmlns:a16="http://schemas.microsoft.com/office/drawing/2014/main" id="{8C5F0E3E-7EB1-4A6A-AB3E-AC74D1E30439}"/>
+                <a16:creationId xmlns:a16="http://schemas.microsoft.com/office/drawing/2014/main" id="{D8BEF087-2C07-4872-A90C-77537509518A}"/>
               </a:ext>
             </a:extLst>
           </p:cNvPr>
@@ -4471,7 +4471,7 @@
           <p:cNvPr id="4" name="">
             <a:extLst xmlns:a="http://schemas.openxmlformats.org/drawingml/2006/main">
               <a:ext uri="{FF2B5EF4-FFF2-40B4-BE49-F238E27FC236}">
-                <a16:creationId xmlns:a16="http://schemas.microsoft.com/office/drawing/2014/main" id="{4FEF0C5F-2B6D-4438-9269-9634CE3D197A}"/>
+                <a16:creationId xmlns:a16="http://schemas.microsoft.com/office/drawing/2014/main" id="{4546CAF3-23FF-4579-93CC-A76DC2CB8C8F}"/>
               </a:ext>
             </a:extLst>
           </p:cNvPr>
@@ -4528,7 +4528,7 @@
           <p:cNvPr id="5" name="">
             <a:extLst xmlns:a="http://schemas.openxmlformats.org/drawingml/2006/main">
               <a:ext uri="{FF2B5EF4-FFF2-40B4-BE49-F238E27FC236}">
-                <a16:creationId xmlns:a16="http://schemas.microsoft.com/office/drawing/2014/main" id="{979F7958-5165-4BAA-A863-4B320AAFD231}"/>
+                <a16:creationId xmlns:a16="http://schemas.microsoft.com/office/drawing/2014/main" id="{2200400A-B1D7-411C-B237-E9C422C4B3E7}"/>
               </a:ext>
             </a:extLst>
           </p:cNvPr>
@@ -4585,7 +4585,7 @@
           <p:cNvPr id="6" name="">
             <a:extLst xmlns:a="http://schemas.openxmlformats.org/drawingml/2006/main">
               <a:ext uri="{FF2B5EF4-FFF2-40B4-BE49-F238E27FC236}">
-                <a16:creationId xmlns:a16="http://schemas.microsoft.com/office/drawing/2014/main" id="{1E790D8F-EACF-427C-AA2E-762155CB7AB5}"/>
+                <a16:creationId xmlns:a16="http://schemas.microsoft.com/office/drawing/2014/main" id="{3536319E-253C-434E-8DFB-CAD6D6C79018}"/>
               </a:ext>
             </a:extLst>
           </p:cNvPr>
@@ -4642,7 +4642,7 @@
           <p:cNvPr id="7" name="">
             <a:extLst xmlns:a="http://schemas.openxmlformats.org/drawingml/2006/main">
               <a:ext uri="{FF2B5EF4-FFF2-40B4-BE49-F238E27FC236}">
-                <a16:creationId xmlns:a16="http://schemas.microsoft.com/office/drawing/2014/main" id="{80699FC5-D2D4-47AE-A461-7DFCEFF486D9}"/>
+                <a16:creationId xmlns:a16="http://schemas.microsoft.com/office/drawing/2014/main" id="{AF8E97AE-0C0A-445F-92BA-6A0958292AC3}"/>
               </a:ext>
             </a:extLst>
           </p:cNvPr>
@@ -4674,7 +4674,7 @@
           <p:cNvPr id="8" name="">
             <a:extLst xmlns:a="http://schemas.openxmlformats.org/drawingml/2006/main">
               <a:ext uri="{FF2B5EF4-FFF2-40B4-BE49-F238E27FC236}">
-                <a16:creationId xmlns:a16="http://schemas.microsoft.com/office/drawing/2014/main" id="{B9B18D16-8E36-4ADF-8F36-E8ECF379943E}"/>
+                <a16:creationId xmlns:a16="http://schemas.microsoft.com/office/drawing/2014/main" id="{652B6CC4-22B9-445C-876E-6FE665EEA9D7}"/>
               </a:ext>
             </a:extLst>
           </p:cNvPr>
@@ -4731,7 +4731,7 @@
           <p:cNvPr id="9" name="">
             <a:extLst xmlns:a="http://schemas.openxmlformats.org/drawingml/2006/main">
               <a:ext uri="{FF2B5EF4-FFF2-40B4-BE49-F238E27FC236}">
-                <a16:creationId xmlns:a16="http://schemas.microsoft.com/office/drawing/2014/main" id="{76389DD5-1EBA-431D-9EFA-482BCABA927F}"/>
+                <a16:creationId xmlns:a16="http://schemas.microsoft.com/office/drawing/2014/main" id="{5BD4A472-B33B-42E3-AC0F-0CBE757073CF}"/>
               </a:ext>
             </a:extLst>
           </p:cNvPr>
@@ -4788,7 +4788,7 @@
           <p:cNvPr id="10" name="">
             <a:extLst xmlns:a="http://schemas.openxmlformats.org/drawingml/2006/main">
               <a:ext uri="{FF2B5EF4-FFF2-40B4-BE49-F238E27FC236}">
-                <a16:creationId xmlns:a16="http://schemas.microsoft.com/office/drawing/2014/main" id="{091EF4C5-B9D8-466A-9349-F69C3044A8A3}"/>
+                <a16:creationId xmlns:a16="http://schemas.microsoft.com/office/drawing/2014/main" id="{848C9565-BCEF-4932-A9D3-7A99B5E72DE1}"/>
               </a:ext>
             </a:extLst>
           </p:cNvPr>
@@ -4822,7 +4822,7 @@
           <p:cNvPr id="11" name="">
             <a:extLst xmlns:a="http://schemas.openxmlformats.org/drawingml/2006/main">
               <a:ext uri="{FF2B5EF4-FFF2-40B4-BE49-F238E27FC236}">
-                <a16:creationId xmlns:a16="http://schemas.microsoft.com/office/drawing/2014/main" id="{9189243C-1974-4467-8D13-B17EC9EB031A}"/>
+                <a16:creationId xmlns:a16="http://schemas.microsoft.com/office/drawing/2014/main" id="{A97370D8-55B7-41FB-9037-9D6D787AABC8}"/>
               </a:ext>
             </a:extLst>
           </p:cNvPr>
@@ -4854,7 +4854,7 @@
           <p:cNvPr id="12" name="">
             <a:extLst xmlns:a="http://schemas.openxmlformats.org/drawingml/2006/main">
               <a:ext uri="{FF2B5EF4-FFF2-40B4-BE49-F238E27FC236}">
-                <a16:creationId xmlns:a16="http://schemas.microsoft.com/office/drawing/2014/main" id="{CACEDE16-2F2D-4837-AD1B-EAEFBBBCE74F}"/>
+                <a16:creationId xmlns:a16="http://schemas.microsoft.com/office/drawing/2014/main" id="{8DC9F72D-9C64-4D37-822A-3C7497B1711E}"/>
               </a:ext>
             </a:extLst>
           </p:cNvPr>
@@ -4911,7 +4911,7 @@
           <p:cNvPr id="13" name="">
             <a:extLst xmlns:a="http://schemas.openxmlformats.org/drawingml/2006/main">
               <a:ext uri="{FF2B5EF4-FFF2-40B4-BE49-F238E27FC236}">
-                <a16:creationId xmlns:a16="http://schemas.microsoft.com/office/drawing/2014/main" id="{1012876B-4481-403E-AB93-CF2AF2D8F253}"/>
+                <a16:creationId xmlns:a16="http://schemas.microsoft.com/office/drawing/2014/main" id="{4F7B73BD-A2B5-43C7-8CF4-317AC7BE8690}"/>
               </a:ext>
             </a:extLst>
           </p:cNvPr>
@@ -4968,7 +4968,7 @@
           <p:cNvPr id="14" name="">
             <a:extLst xmlns:a="http://schemas.openxmlformats.org/drawingml/2006/main">
               <a:ext uri="{FF2B5EF4-FFF2-40B4-BE49-F238E27FC236}">
-                <a16:creationId xmlns:a16="http://schemas.microsoft.com/office/drawing/2014/main" id="{721E260E-C4D8-4FA5-94BF-E97829CF036B}"/>
+                <a16:creationId xmlns:a16="http://schemas.microsoft.com/office/drawing/2014/main" id="{87AE6FC5-A6AA-411C-A52E-5D044A15948A}"/>
               </a:ext>
             </a:extLst>
           </p:cNvPr>
@@ -5002,7 +5002,7 @@
           <p:cNvPr id="15" name="">
             <a:extLst xmlns:a="http://schemas.openxmlformats.org/drawingml/2006/main">
               <a:ext uri="{FF2B5EF4-FFF2-40B4-BE49-F238E27FC236}">
-                <a16:creationId xmlns:a16="http://schemas.microsoft.com/office/drawing/2014/main" id="{63CC8E2D-5825-4A69-B8C7-0682D092F2D7}"/>
+                <a16:creationId xmlns:a16="http://schemas.microsoft.com/office/drawing/2014/main" id="{27E37141-719A-45A9-BF77-596D0F086E57}"/>
               </a:ext>
             </a:extLst>
           </p:cNvPr>
@@ -5034,7 +5034,7 @@
           <p:cNvPr id="16" name="">
             <a:extLst xmlns:a="http://schemas.openxmlformats.org/drawingml/2006/main">
               <a:ext uri="{FF2B5EF4-FFF2-40B4-BE49-F238E27FC236}">
-                <a16:creationId xmlns:a16="http://schemas.microsoft.com/office/drawing/2014/main" id="{EF0A2B35-2F74-4E66-98C7-3676B96D13F0}"/>
+                <a16:creationId xmlns:a16="http://schemas.microsoft.com/office/drawing/2014/main" id="{EBCA742A-BF2B-40D7-8AA6-069960C2C35F}"/>
               </a:ext>
             </a:extLst>
           </p:cNvPr>
@@ -5091,7 +5091,7 @@
           <p:cNvPr id="17" name="">
             <a:extLst xmlns:a="http://schemas.openxmlformats.org/drawingml/2006/main">
               <a:ext uri="{FF2B5EF4-FFF2-40B4-BE49-F238E27FC236}">
-                <a16:creationId xmlns:a16="http://schemas.microsoft.com/office/drawing/2014/main" id="{0342AEF1-FE9D-43E0-8074-95F12E897251}"/>
+                <a16:creationId xmlns:a16="http://schemas.microsoft.com/office/drawing/2014/main" id="{4402ED3A-48A5-4D84-ACB4-EBDC395D4E58}"/>
               </a:ext>
             </a:extLst>
           </p:cNvPr>
@@ -5148,7 +5148,7 @@
           <p:cNvPr id="18" name="">
             <a:extLst xmlns:a="http://schemas.openxmlformats.org/drawingml/2006/main">
               <a:ext uri="{FF2B5EF4-FFF2-40B4-BE49-F238E27FC236}">
-                <a16:creationId xmlns:a16="http://schemas.microsoft.com/office/drawing/2014/main" id="{C3890975-AF5B-43AA-B917-E5A812A359A4}"/>
+                <a16:creationId xmlns:a16="http://schemas.microsoft.com/office/drawing/2014/main" id="{AD33130A-70D8-4700-91B8-BF454B6114A2}"/>
               </a:ext>
             </a:extLst>
           </p:cNvPr>
@@ -5182,7 +5182,7 @@
           <p:cNvPr id="19" name="">
             <a:extLst xmlns:a="http://schemas.openxmlformats.org/drawingml/2006/main">
               <a:ext uri="{FF2B5EF4-FFF2-40B4-BE49-F238E27FC236}">
-                <a16:creationId xmlns:a16="http://schemas.microsoft.com/office/drawing/2014/main" id="{57BE7B2C-E4E3-4B64-98EB-99A84C6283D3}"/>
+                <a16:creationId xmlns:a16="http://schemas.microsoft.com/office/drawing/2014/main" id="{A7BC9157-A83E-45A1-955A-307386826F7D}"/>
               </a:ext>
             </a:extLst>
           </p:cNvPr>
@@ -5214,7 +5214,7 @@
           <p:cNvPr id="20" name="">
             <a:extLst xmlns:a="http://schemas.openxmlformats.org/drawingml/2006/main">
               <a:ext uri="{FF2B5EF4-FFF2-40B4-BE49-F238E27FC236}">
-                <a16:creationId xmlns:a16="http://schemas.microsoft.com/office/drawing/2014/main" id="{6D130C0E-80F4-4139-8F98-E6E1F97DDF70}"/>
+                <a16:creationId xmlns:a16="http://schemas.microsoft.com/office/drawing/2014/main" id="{2E632072-58BD-4390-A39E-24F5F8F77D9A}"/>
               </a:ext>
             </a:extLst>
           </p:cNvPr>
@@ -5271,7 +5271,7 @@
           <p:cNvPr id="21" name="">
             <a:extLst xmlns:a="http://schemas.openxmlformats.org/drawingml/2006/main">
               <a:ext uri="{FF2B5EF4-FFF2-40B4-BE49-F238E27FC236}">
-                <a16:creationId xmlns:a16="http://schemas.microsoft.com/office/drawing/2014/main" id="{6A5D72FD-22D9-40E1-BD42-2AA6C8AE964A}"/>
+                <a16:creationId xmlns:a16="http://schemas.microsoft.com/office/drawing/2014/main" id="{E52033AD-888B-4984-91F9-F8E9DB002CA6}"/>
               </a:ext>
             </a:extLst>
           </p:cNvPr>
@@ -5328,7 +5328,7 @@
           <p:cNvPr id="22" name="">
             <a:extLst xmlns:a="http://schemas.openxmlformats.org/drawingml/2006/main">
               <a:ext uri="{FF2B5EF4-FFF2-40B4-BE49-F238E27FC236}">
-                <a16:creationId xmlns:a16="http://schemas.microsoft.com/office/drawing/2014/main" id="{B0EC557C-8DE0-497A-A045-4B44374CA247}"/>
+                <a16:creationId xmlns:a16="http://schemas.microsoft.com/office/drawing/2014/main" id="{86020CB5-8343-4BFE-AA9A-2C7B893E1DC0}"/>
               </a:ext>
             </a:extLst>
           </p:cNvPr>
@@ -5383,7 +5383,7 @@
     </p:spTree>
     <p:extLst>
       <p:ext uri="{BB962C8B-B14F-4D97-AF65-F5344CB8AC3E}">
-        <p14:creationId xmlns:p14="http://schemas.microsoft.com/office/powerpoint/2010/main" val="829119184"/>
+        <p14:creationId xmlns:p14="http://schemas.microsoft.com/office/powerpoint/2010/main" val="1441364543"/>
       </p:ext>
     </p:extLst>
   </p:cSld>
@@ -5584,7 +5584,7 @@
           <p:cNvPr id="23" name="">
             <a:extLst xmlns:a="http://schemas.openxmlformats.org/drawingml/2006/main">
               <a:ext uri="{FF2B5EF4-FFF2-40B4-BE49-F238E27FC236}">
-                <a16:creationId xmlns:a16="http://schemas.microsoft.com/office/drawing/2014/main" id="{C17E84B5-76BB-40CC-894C-258148015FA9}"/>
+                <a16:creationId xmlns:a16="http://schemas.microsoft.com/office/drawing/2014/main" id="{607D12D0-130C-4AA8-AC15-F186EC1EB4E0}"/>
               </a:ext>
             </a:extLst>
           </p:cNvPr>
@@ -5616,7 +5616,7 @@
           <p:cNvPr id="2" name="">
             <a:extLst xmlns:a="http://schemas.openxmlformats.org/drawingml/2006/main">
               <a:ext uri="{FF2B5EF4-FFF2-40B4-BE49-F238E27FC236}">
-                <a16:creationId xmlns:a16="http://schemas.microsoft.com/office/drawing/2014/main" id="{CB7B050D-B231-4766-8A2C-E0C042F02A67}"/>
+                <a16:creationId xmlns:a16="http://schemas.microsoft.com/office/drawing/2014/main" id="{EDFB2E5A-3759-4FFA-9713-F4B4E3C90FAB}"/>
               </a:ext>
             </a:extLst>
           </p:cNvPr>
@@ -5673,7 +5673,7 @@
           <p:cNvPr id="3" name="">
             <a:extLst xmlns:a="http://schemas.openxmlformats.org/drawingml/2006/main">
               <a:ext uri="{FF2B5EF4-FFF2-40B4-BE49-F238E27FC236}">
-                <a16:creationId xmlns:a16="http://schemas.microsoft.com/office/drawing/2014/main" id="{1F4F8357-5C7D-4F57-8332-4CFF7BD716E9}"/>
+                <a16:creationId xmlns:a16="http://schemas.microsoft.com/office/drawing/2014/main" id="{9F4817D7-5915-4E19-92A3-10185E526EB0}"/>
               </a:ext>
             </a:extLst>
           </p:cNvPr>
@@ -5705,7 +5705,7 @@
           <p:cNvPr id="4" name="">
             <a:extLst xmlns:a="http://schemas.openxmlformats.org/drawingml/2006/main">
               <a:ext uri="{FF2B5EF4-FFF2-40B4-BE49-F238E27FC236}">
-                <a16:creationId xmlns:a16="http://schemas.microsoft.com/office/drawing/2014/main" id="{37A7809B-F811-4919-97E5-FB9E9B44A103}"/>
+                <a16:creationId xmlns:a16="http://schemas.microsoft.com/office/drawing/2014/main" id="{ABA67CBF-DB3C-4E04-8D48-45CEA6E298F2}"/>
               </a:ext>
             </a:extLst>
           </p:cNvPr>
@@ -5762,7 +5762,7 @@
           <p:cNvPr id="5" name="">
             <a:extLst xmlns:a="http://schemas.openxmlformats.org/drawingml/2006/main">
               <a:ext uri="{FF2B5EF4-FFF2-40B4-BE49-F238E27FC236}">
-                <a16:creationId xmlns:a16="http://schemas.microsoft.com/office/drawing/2014/main" id="{EC6C4FFB-520B-4E5C-A046-9B9896D8853D}"/>
+                <a16:creationId xmlns:a16="http://schemas.microsoft.com/office/drawing/2014/main" id="{B4E12F9F-B5AD-4DEC-9FC2-E860E5AD9BF0}"/>
               </a:ext>
             </a:extLst>
           </p:cNvPr>
@@ -5819,7 +5819,7 @@
           <p:cNvPr id="6" name="">
             <a:extLst xmlns:a="http://schemas.openxmlformats.org/drawingml/2006/main">
               <a:ext uri="{FF2B5EF4-FFF2-40B4-BE49-F238E27FC236}">
-                <a16:creationId xmlns:a16="http://schemas.microsoft.com/office/drawing/2014/main" id="{C74AE763-7790-4878-AFBE-FC9BFBE2EBFE}"/>
+                <a16:creationId xmlns:a16="http://schemas.microsoft.com/office/drawing/2014/main" id="{766FC093-FAAD-4C14-B855-DB74151644F0}"/>
               </a:ext>
             </a:extLst>
           </p:cNvPr>
@@ -5876,7 +5876,7 @@
           <p:cNvPr id="7" name="">
             <a:extLst xmlns:a="http://schemas.openxmlformats.org/drawingml/2006/main">
               <a:ext uri="{FF2B5EF4-FFF2-40B4-BE49-F238E27FC236}">
-                <a16:creationId xmlns:a16="http://schemas.microsoft.com/office/drawing/2014/main" id="{5550002D-494D-4319-A7EF-FA5F64C1A436}"/>
+                <a16:creationId xmlns:a16="http://schemas.microsoft.com/office/drawing/2014/main" id="{4E694C5A-CAD0-4372-9F33-F57F5A5EDE84}"/>
               </a:ext>
             </a:extLst>
           </p:cNvPr>
@@ -5908,7 +5908,7 @@
           <p:cNvPr id="8" name="">
             <a:extLst xmlns:a="http://schemas.openxmlformats.org/drawingml/2006/main">
               <a:ext uri="{FF2B5EF4-FFF2-40B4-BE49-F238E27FC236}">
-                <a16:creationId xmlns:a16="http://schemas.microsoft.com/office/drawing/2014/main" id="{004EDA92-8022-400F-BC5D-49766467D9AE}"/>
+                <a16:creationId xmlns:a16="http://schemas.microsoft.com/office/drawing/2014/main" id="{29AECE6A-CA30-4308-81DB-98A14230743A}"/>
               </a:ext>
             </a:extLst>
           </p:cNvPr>
@@ -5965,7 +5965,7 @@
           <p:cNvPr id="9" name="">
             <a:extLst xmlns:a="http://schemas.openxmlformats.org/drawingml/2006/main">
               <a:ext uri="{FF2B5EF4-FFF2-40B4-BE49-F238E27FC236}">
-                <a16:creationId xmlns:a16="http://schemas.microsoft.com/office/drawing/2014/main" id="{499F88EF-12B3-4415-B550-062404362A60}"/>
+                <a16:creationId xmlns:a16="http://schemas.microsoft.com/office/drawing/2014/main" id="{F7782810-6E87-45C1-9271-0E4F03B98DC7}"/>
               </a:ext>
             </a:extLst>
           </p:cNvPr>
@@ -6022,7 +6022,7 @@
           <p:cNvPr id="10" name="">
             <a:extLst xmlns:a="http://schemas.openxmlformats.org/drawingml/2006/main">
               <a:ext uri="{FF2B5EF4-FFF2-40B4-BE49-F238E27FC236}">
-                <a16:creationId xmlns:a16="http://schemas.microsoft.com/office/drawing/2014/main" id="{9C8B780D-306D-4218-9DE8-A636A35EADAC}"/>
+                <a16:creationId xmlns:a16="http://schemas.microsoft.com/office/drawing/2014/main" id="{E16D2503-B4C6-4C8D-9736-D8D74BFC80A0}"/>
               </a:ext>
             </a:extLst>
           </p:cNvPr>
@@ -6056,7 +6056,7 @@
           <p:cNvPr id="11" name="">
             <a:extLst xmlns:a="http://schemas.openxmlformats.org/drawingml/2006/main">
               <a:ext uri="{FF2B5EF4-FFF2-40B4-BE49-F238E27FC236}">
-                <a16:creationId xmlns:a16="http://schemas.microsoft.com/office/drawing/2014/main" id="{F4D8CF4E-0967-4985-BC72-4BA77D978BCC}"/>
+                <a16:creationId xmlns:a16="http://schemas.microsoft.com/office/drawing/2014/main" id="{D6926B0F-1805-4573-83AC-8F5936BF6E71}"/>
               </a:ext>
             </a:extLst>
           </p:cNvPr>
@@ -6088,7 +6088,7 @@
           <p:cNvPr id="12" name="">
             <a:extLst xmlns:a="http://schemas.openxmlformats.org/drawingml/2006/main">
               <a:ext uri="{FF2B5EF4-FFF2-40B4-BE49-F238E27FC236}">
-                <a16:creationId xmlns:a16="http://schemas.microsoft.com/office/drawing/2014/main" id="{3CB79352-3BD3-437F-B80E-D1EF836CA326}"/>
+                <a16:creationId xmlns:a16="http://schemas.microsoft.com/office/drawing/2014/main" id="{36FA7952-7F5F-4D58-9D12-CA94FA05887B}"/>
               </a:ext>
             </a:extLst>
           </p:cNvPr>
@@ -6145,7 +6145,7 @@
           <p:cNvPr id="13" name="">
             <a:extLst xmlns:a="http://schemas.openxmlformats.org/drawingml/2006/main">
               <a:ext uri="{FF2B5EF4-FFF2-40B4-BE49-F238E27FC236}">
-                <a16:creationId xmlns:a16="http://schemas.microsoft.com/office/drawing/2014/main" id="{DEC98E5E-7042-493E-8091-2011BC2BCC64}"/>
+                <a16:creationId xmlns:a16="http://schemas.microsoft.com/office/drawing/2014/main" id="{C4292DA7-87D7-47EF-A8EE-EE2DEDCAAB93}"/>
               </a:ext>
             </a:extLst>
           </p:cNvPr>
@@ -6202,7 +6202,7 @@
           <p:cNvPr id="14" name="">
             <a:extLst xmlns:a="http://schemas.openxmlformats.org/drawingml/2006/main">
               <a:ext uri="{FF2B5EF4-FFF2-40B4-BE49-F238E27FC236}">
-                <a16:creationId xmlns:a16="http://schemas.microsoft.com/office/drawing/2014/main" id="{B582C21D-FAFB-45D6-AF3C-E5225F0A290C}"/>
+                <a16:creationId xmlns:a16="http://schemas.microsoft.com/office/drawing/2014/main" id="{8C5D5EF4-2A7A-476C-A0EF-98271F784E60}"/>
               </a:ext>
             </a:extLst>
           </p:cNvPr>
@@ -6236,7 +6236,7 @@
           <p:cNvPr id="15" name="">
             <a:extLst xmlns:a="http://schemas.openxmlformats.org/drawingml/2006/main">
               <a:ext uri="{FF2B5EF4-FFF2-40B4-BE49-F238E27FC236}">
-                <a16:creationId xmlns:a16="http://schemas.microsoft.com/office/drawing/2014/main" id="{CFF4D584-EBF2-4430-B33D-5DBFF6B7B59D}"/>
+                <a16:creationId xmlns:a16="http://schemas.microsoft.com/office/drawing/2014/main" id="{E315F1F8-3E80-4D8A-8082-B307ABD52F98}"/>
               </a:ext>
             </a:extLst>
           </p:cNvPr>
@@ -6268,7 +6268,7 @@
           <p:cNvPr id="16" name="">
             <a:extLst xmlns:a="http://schemas.openxmlformats.org/drawingml/2006/main">
               <a:ext uri="{FF2B5EF4-FFF2-40B4-BE49-F238E27FC236}">
-                <a16:creationId xmlns:a16="http://schemas.microsoft.com/office/drawing/2014/main" id="{D831CF3A-B1C2-4EB8-8896-581920EBAE11}"/>
+                <a16:creationId xmlns:a16="http://schemas.microsoft.com/office/drawing/2014/main" id="{65E6D893-2FE3-484D-8E69-A059896A3155}"/>
               </a:ext>
             </a:extLst>
           </p:cNvPr>
@@ -6325,7 +6325,7 @@
           <p:cNvPr id="17" name="">
             <a:extLst xmlns:a="http://schemas.openxmlformats.org/drawingml/2006/main">
               <a:ext uri="{FF2B5EF4-FFF2-40B4-BE49-F238E27FC236}">
-                <a16:creationId xmlns:a16="http://schemas.microsoft.com/office/drawing/2014/main" id="{7144B74A-4BFF-4918-9614-1B41C7983B48}"/>
+                <a16:creationId xmlns:a16="http://schemas.microsoft.com/office/drawing/2014/main" id="{C6A924B1-1D7A-42B6-AE8B-4A5F8F538256}"/>
               </a:ext>
             </a:extLst>
           </p:cNvPr>
@@ -6382,7 +6382,7 @@
           <p:cNvPr id="18" name="">
             <a:extLst xmlns:a="http://schemas.openxmlformats.org/drawingml/2006/main">
               <a:ext uri="{FF2B5EF4-FFF2-40B4-BE49-F238E27FC236}">
-                <a16:creationId xmlns:a16="http://schemas.microsoft.com/office/drawing/2014/main" id="{92D1C4C7-6BCB-4F55-9A4E-9E8D43ECF41C}"/>
+                <a16:creationId xmlns:a16="http://schemas.microsoft.com/office/drawing/2014/main" id="{470F49F0-8E35-41A4-81D4-8F6F13A0A2EC}"/>
               </a:ext>
             </a:extLst>
           </p:cNvPr>
@@ -6416,7 +6416,7 @@
           <p:cNvPr id="19" name="">
             <a:extLst xmlns:a="http://schemas.openxmlformats.org/drawingml/2006/main">
               <a:ext uri="{FF2B5EF4-FFF2-40B4-BE49-F238E27FC236}">
-                <a16:creationId xmlns:a16="http://schemas.microsoft.com/office/drawing/2014/main" id="{2DFC6B1A-10D3-44F4-BEE4-938FB5557FB6}"/>
+                <a16:creationId xmlns:a16="http://schemas.microsoft.com/office/drawing/2014/main" id="{4222D636-E1D8-41D6-B0BB-8E90AFB3F3D9}"/>
               </a:ext>
             </a:extLst>
           </p:cNvPr>
@@ -6448,7 +6448,7 @@
           <p:cNvPr id="20" name="">
             <a:extLst xmlns:a="http://schemas.openxmlformats.org/drawingml/2006/main">
               <a:ext uri="{FF2B5EF4-FFF2-40B4-BE49-F238E27FC236}">
-                <a16:creationId xmlns:a16="http://schemas.microsoft.com/office/drawing/2014/main" id="{9C67E865-BC4B-46A0-A86B-C085FC143C02}"/>
+                <a16:creationId xmlns:a16="http://schemas.microsoft.com/office/drawing/2014/main" id="{134F90FC-2C09-4214-85D6-75C98EBD3770}"/>
               </a:ext>
             </a:extLst>
           </p:cNvPr>
@@ -6505,7 +6505,7 @@
           <p:cNvPr id="21" name="">
             <a:extLst xmlns:a="http://schemas.openxmlformats.org/drawingml/2006/main">
               <a:ext uri="{FF2B5EF4-FFF2-40B4-BE49-F238E27FC236}">
-                <a16:creationId xmlns:a16="http://schemas.microsoft.com/office/drawing/2014/main" id="{4C4A6A87-0331-407B-AEB2-5099EA54AA05}"/>
+                <a16:creationId xmlns:a16="http://schemas.microsoft.com/office/drawing/2014/main" id="{29C97C43-B84E-4443-9219-C0E7BD6D030E}"/>
               </a:ext>
             </a:extLst>
           </p:cNvPr>
@@ -6562,7 +6562,7 @@
           <p:cNvPr id="22" name="">
             <a:extLst xmlns:a="http://schemas.openxmlformats.org/drawingml/2006/main">
               <a:ext uri="{FF2B5EF4-FFF2-40B4-BE49-F238E27FC236}">
-                <a16:creationId xmlns:a16="http://schemas.microsoft.com/office/drawing/2014/main" id="{448405A9-BE69-449D-9DAD-9C996C00AF36}"/>
+                <a16:creationId xmlns:a16="http://schemas.microsoft.com/office/drawing/2014/main" id="{38173177-0A6B-475F-ABA7-10559B2F49A6}"/>
               </a:ext>
             </a:extLst>
           </p:cNvPr>
@@ -6617,7 +6617,7 @@
     </p:spTree>
     <p:extLst>
       <p:ext uri="{BB962C8B-B14F-4D97-AF65-F5344CB8AC3E}">
-        <p14:creationId xmlns:p14="http://schemas.microsoft.com/office/powerpoint/2010/main" val="1647233003"/>
+        <p14:creationId xmlns:p14="http://schemas.microsoft.com/office/powerpoint/2010/main" val="42246795"/>
       </p:ext>
     </p:extLst>
   </p:cSld>
@@ -6818,7 +6818,7 @@
           <p:cNvPr id="16" name="">
             <a:extLst xmlns:a="http://schemas.openxmlformats.org/drawingml/2006/main">
               <a:ext uri="{FF2B5EF4-FFF2-40B4-BE49-F238E27FC236}">
-                <a16:creationId xmlns:a16="http://schemas.microsoft.com/office/drawing/2014/main" id="{3448C137-17B6-43F1-946D-9FE13A8E5F6A}"/>
+                <a16:creationId xmlns:a16="http://schemas.microsoft.com/office/drawing/2014/main" id="{8982A5E4-E328-4C84-B1C3-4910FB0FB7BA}"/>
               </a:ext>
             </a:extLst>
           </p:cNvPr>
@@ -6850,7 +6850,7 @@
           <p:cNvPr id="2" name="">
             <a:extLst xmlns:a="http://schemas.openxmlformats.org/drawingml/2006/main">
               <a:ext uri="{FF2B5EF4-FFF2-40B4-BE49-F238E27FC236}">
-                <a16:creationId xmlns:a16="http://schemas.microsoft.com/office/drawing/2014/main" id="{BB738C31-72B4-4EF4-806B-5A9DD3EE3B2B}"/>
+                <a16:creationId xmlns:a16="http://schemas.microsoft.com/office/drawing/2014/main" id="{140FF4C3-EEB7-452D-883E-C262D1FDF8A1}"/>
               </a:ext>
             </a:extLst>
           </p:cNvPr>
@@ -6907,7 +6907,7 @@
           <p:cNvPr id="3" name="">
             <a:extLst xmlns:a="http://schemas.openxmlformats.org/drawingml/2006/main">
               <a:ext uri="{FF2B5EF4-FFF2-40B4-BE49-F238E27FC236}">
-                <a16:creationId xmlns:a16="http://schemas.microsoft.com/office/drawing/2014/main" id="{04260340-6B2C-4D10-9B31-519670C9B150}"/>
+                <a16:creationId xmlns:a16="http://schemas.microsoft.com/office/drawing/2014/main" id="{CBBE1661-4EF8-45C6-858A-A1AC26ECB1F0}"/>
               </a:ext>
             </a:extLst>
           </p:cNvPr>
@@ -6939,7 +6939,7 @@
           <p:cNvPr id="4" name="">
             <a:extLst xmlns:a="http://schemas.openxmlformats.org/drawingml/2006/main">
               <a:ext uri="{FF2B5EF4-FFF2-40B4-BE49-F238E27FC236}">
-                <a16:creationId xmlns:a16="http://schemas.microsoft.com/office/drawing/2014/main" id="{DDB6524F-6F29-4EAA-A690-EAFEE15A0503}"/>
+                <a16:creationId xmlns:a16="http://schemas.microsoft.com/office/drawing/2014/main" id="{4E7E8EE2-45CB-4D0C-B809-8FEEE854F479}"/>
               </a:ext>
             </a:extLst>
           </p:cNvPr>
@@ -6996,7 +6996,7 @@
           <p:cNvPr id="5" name="">
             <a:extLst xmlns:a="http://schemas.openxmlformats.org/drawingml/2006/main">
               <a:ext uri="{FF2B5EF4-FFF2-40B4-BE49-F238E27FC236}">
-                <a16:creationId xmlns:a16="http://schemas.microsoft.com/office/drawing/2014/main" id="{3E71B25C-917F-4D51-9C16-0AE912D249EC}"/>
+                <a16:creationId xmlns:a16="http://schemas.microsoft.com/office/drawing/2014/main" id="{4C1B110B-11ED-47C0-8E9D-D66EAAB94E22}"/>
               </a:ext>
             </a:extLst>
           </p:cNvPr>
@@ -7053,7 +7053,7 @@
           <p:cNvPr id="6" name="">
             <a:extLst xmlns:a="http://schemas.openxmlformats.org/drawingml/2006/main">
               <a:ext uri="{FF2B5EF4-FFF2-40B4-BE49-F238E27FC236}">
-                <a16:creationId xmlns:a16="http://schemas.microsoft.com/office/drawing/2014/main" id="{D97DDCE7-F36D-4FDF-9A7C-4FEA8D453490}"/>
+                <a16:creationId xmlns:a16="http://schemas.microsoft.com/office/drawing/2014/main" id="{64D723D4-7483-4529-9018-5ED34204AFB6}"/>
               </a:ext>
             </a:extLst>
           </p:cNvPr>
@@ -7110,7 +7110,7 @@
           <p:cNvPr id="7" name="">
             <a:extLst xmlns:a="http://schemas.openxmlformats.org/drawingml/2006/main">
               <a:ext uri="{FF2B5EF4-FFF2-40B4-BE49-F238E27FC236}">
-                <a16:creationId xmlns:a16="http://schemas.microsoft.com/office/drawing/2014/main" id="{714A6FBA-552D-4DE8-A712-C28B85BFD716}"/>
+                <a16:creationId xmlns:a16="http://schemas.microsoft.com/office/drawing/2014/main" id="{E3C9CE6A-1C43-485E-897B-2D97765C72AC}"/>
               </a:ext>
             </a:extLst>
           </p:cNvPr>
@@ -7142,7 +7142,7 @@
           <p:cNvPr id="8" name="">
             <a:extLst xmlns:a="http://schemas.openxmlformats.org/drawingml/2006/main">
               <a:ext uri="{FF2B5EF4-FFF2-40B4-BE49-F238E27FC236}">
-                <a16:creationId xmlns:a16="http://schemas.microsoft.com/office/drawing/2014/main" id="{38F7935A-EC9A-402C-8882-311DBDA737C9}"/>
+                <a16:creationId xmlns:a16="http://schemas.microsoft.com/office/drawing/2014/main" id="{0775394B-AAE5-49CE-9E3B-A22A6B3675C7}"/>
               </a:ext>
             </a:extLst>
           </p:cNvPr>
@@ -7199,7 +7199,7 @@
           <p:cNvPr id="9" name="">
             <a:extLst xmlns:a="http://schemas.openxmlformats.org/drawingml/2006/main">
               <a:ext uri="{FF2B5EF4-FFF2-40B4-BE49-F238E27FC236}">
-                <a16:creationId xmlns:a16="http://schemas.microsoft.com/office/drawing/2014/main" id="{A0A1778C-138A-4983-B671-EE0D8678D97A}"/>
+                <a16:creationId xmlns:a16="http://schemas.microsoft.com/office/drawing/2014/main" id="{ACA25BB2-5F01-44E7-8141-1698FF26A4FB}"/>
               </a:ext>
             </a:extLst>
           </p:cNvPr>
@@ -7256,7 +7256,7 @@
           <p:cNvPr id="10" name="">
             <a:extLst xmlns:a="http://schemas.openxmlformats.org/drawingml/2006/main">
               <a:ext uri="{FF2B5EF4-FFF2-40B4-BE49-F238E27FC236}">
-                <a16:creationId xmlns:a16="http://schemas.microsoft.com/office/drawing/2014/main" id="{EDC562E7-4EB0-44EF-8309-CD9510D42C44}"/>
+                <a16:creationId xmlns:a16="http://schemas.microsoft.com/office/drawing/2014/main" id="{DF9E2533-C415-4625-ADD6-2ECDF9AC9F81}"/>
               </a:ext>
             </a:extLst>
           </p:cNvPr>
@@ -7313,7 +7313,7 @@
           <p:cNvPr id="11" name="">
             <a:extLst xmlns:a="http://schemas.openxmlformats.org/drawingml/2006/main">
               <a:ext uri="{FF2B5EF4-FFF2-40B4-BE49-F238E27FC236}">
-                <a16:creationId xmlns:a16="http://schemas.microsoft.com/office/drawing/2014/main" id="{83912576-3B0F-4E7B-A98E-7027A4B75CD0}"/>
+                <a16:creationId xmlns:a16="http://schemas.microsoft.com/office/drawing/2014/main" id="{C2E8D1D2-4726-4BD1-B001-53B47D79D14A}"/>
               </a:ext>
             </a:extLst>
           </p:cNvPr>
@@ -7345,7 +7345,7 @@
           <p:cNvPr id="12" name="">
             <a:extLst xmlns:a="http://schemas.openxmlformats.org/drawingml/2006/main">
               <a:ext uri="{FF2B5EF4-FFF2-40B4-BE49-F238E27FC236}">
-                <a16:creationId xmlns:a16="http://schemas.microsoft.com/office/drawing/2014/main" id="{24C0B85F-6DC3-4320-9654-B6090A366DCD}"/>
+                <a16:creationId xmlns:a16="http://schemas.microsoft.com/office/drawing/2014/main" id="{722BDEC7-3CA3-49B4-A1AC-DDDEA2AC3931}"/>
               </a:ext>
             </a:extLst>
           </p:cNvPr>
@@ -7402,7 +7402,7 @@
           <p:cNvPr id="13" name="">
             <a:extLst xmlns:a="http://schemas.openxmlformats.org/drawingml/2006/main">
               <a:ext uri="{FF2B5EF4-FFF2-40B4-BE49-F238E27FC236}">
-                <a16:creationId xmlns:a16="http://schemas.microsoft.com/office/drawing/2014/main" id="{A01832B1-DBA6-4378-8EEA-4DFEA49C8E05}"/>
+                <a16:creationId xmlns:a16="http://schemas.microsoft.com/office/drawing/2014/main" id="{7F4F2DF0-41E0-4675-8525-A3B38948225A}"/>
               </a:ext>
             </a:extLst>
           </p:cNvPr>
@@ -7459,7 +7459,7 @@
           <p:cNvPr id="14" name="">
             <a:extLst xmlns:a="http://schemas.openxmlformats.org/drawingml/2006/main">
               <a:ext uri="{FF2B5EF4-FFF2-40B4-BE49-F238E27FC236}">
-                <a16:creationId xmlns:a16="http://schemas.microsoft.com/office/drawing/2014/main" id="{3BBB21B5-2DA7-49B5-9D0D-EA9FD4C5EEE8}"/>
+                <a16:creationId xmlns:a16="http://schemas.microsoft.com/office/drawing/2014/main" id="{2DE126F1-7ABA-4DE2-B249-E1D013778873}"/>
               </a:ext>
             </a:extLst>
           </p:cNvPr>
@@ -7516,7 +7516,7 @@
           <p:cNvPr id="15" name="">
             <a:extLst xmlns:a="http://schemas.openxmlformats.org/drawingml/2006/main">
               <a:ext uri="{FF2B5EF4-FFF2-40B4-BE49-F238E27FC236}">
-                <a16:creationId xmlns:a16="http://schemas.microsoft.com/office/drawing/2014/main" id="{F4072E55-8FC7-4586-AAAF-C135A1128B1A}"/>
+                <a16:creationId xmlns:a16="http://schemas.microsoft.com/office/drawing/2014/main" id="{16C34400-4FDF-4871-9C8F-A37E4DE64A7D}"/>
               </a:ext>
             </a:extLst>
           </p:cNvPr>
@@ -7571,7 +7571,7 @@
     </p:spTree>
     <p:extLst>
       <p:ext uri="{BB962C8B-B14F-4D97-AF65-F5344CB8AC3E}">
-        <p14:creationId xmlns:p14="http://schemas.microsoft.com/office/powerpoint/2010/main" val="1026684516"/>
+        <p14:creationId xmlns:p14="http://schemas.microsoft.com/office/powerpoint/2010/main" val="624795285"/>
       </p:ext>
     </p:extLst>
   </p:cSld>
@@ -7772,7 +7772,7 @@
           <p:cNvPr id="23" name="">
             <a:extLst xmlns:a="http://schemas.openxmlformats.org/drawingml/2006/main">
               <a:ext uri="{FF2B5EF4-FFF2-40B4-BE49-F238E27FC236}">
-                <a16:creationId xmlns:a16="http://schemas.microsoft.com/office/drawing/2014/main" id="{1F3C110C-62DB-4D6E-8F13-D9974A98CD4E}"/>
+                <a16:creationId xmlns:a16="http://schemas.microsoft.com/office/drawing/2014/main" id="{E1E00169-4501-434B-945F-61CD0195FFCA}"/>
               </a:ext>
             </a:extLst>
           </p:cNvPr>
@@ -7804,7 +7804,7 @@
           <p:cNvPr id="2" name="">
             <a:extLst xmlns:a="http://schemas.openxmlformats.org/drawingml/2006/main">
               <a:ext uri="{FF2B5EF4-FFF2-40B4-BE49-F238E27FC236}">
-                <a16:creationId xmlns:a16="http://schemas.microsoft.com/office/drawing/2014/main" id="{0CDFE963-F1BF-4143-8D8D-6D9060D0F34D}"/>
+                <a16:creationId xmlns:a16="http://schemas.microsoft.com/office/drawing/2014/main" id="{CA583FEC-5621-45B7-8CAE-2884FC7E7E76}"/>
               </a:ext>
             </a:extLst>
           </p:cNvPr>
@@ -7861,7 +7861,7 @@
           <p:cNvPr id="3" name="">
             <a:extLst xmlns:a="http://schemas.openxmlformats.org/drawingml/2006/main">
               <a:ext uri="{FF2B5EF4-FFF2-40B4-BE49-F238E27FC236}">
-                <a16:creationId xmlns:a16="http://schemas.microsoft.com/office/drawing/2014/main" id="{777E3A57-3801-4D4D-8742-92EFA6E5DEC0}"/>
+                <a16:creationId xmlns:a16="http://schemas.microsoft.com/office/drawing/2014/main" id="{DF9F9927-4C17-4DF7-921B-965601E1E4B3}"/>
               </a:ext>
             </a:extLst>
           </p:cNvPr>
@@ -7893,7 +7893,7 @@
           <p:cNvPr id="4" name="">
             <a:extLst xmlns:a="http://schemas.openxmlformats.org/drawingml/2006/main">
               <a:ext uri="{FF2B5EF4-FFF2-40B4-BE49-F238E27FC236}">
-                <a16:creationId xmlns:a16="http://schemas.microsoft.com/office/drawing/2014/main" id="{081ED703-4514-4490-9DE3-9151867BA908}"/>
+                <a16:creationId xmlns:a16="http://schemas.microsoft.com/office/drawing/2014/main" id="{D004F35B-FECA-4903-B73D-8BC93FC7166B}"/>
               </a:ext>
             </a:extLst>
           </p:cNvPr>
@@ -7950,7 +7950,7 @@
           <p:cNvPr id="5" name="">
             <a:extLst xmlns:a="http://schemas.openxmlformats.org/drawingml/2006/main">
               <a:ext uri="{FF2B5EF4-FFF2-40B4-BE49-F238E27FC236}">
-                <a16:creationId xmlns:a16="http://schemas.microsoft.com/office/drawing/2014/main" id="{71ADB1DE-A769-44B4-8BF7-7389B8220634}"/>
+                <a16:creationId xmlns:a16="http://schemas.microsoft.com/office/drawing/2014/main" id="{A0AF42BA-20DC-4F5F-AB3D-A938FCC9E783}"/>
               </a:ext>
             </a:extLst>
           </p:cNvPr>
@@ -8007,7 +8007,7 @@
           <p:cNvPr id="6" name="">
             <a:extLst xmlns:a="http://schemas.openxmlformats.org/drawingml/2006/main">
               <a:ext uri="{FF2B5EF4-FFF2-40B4-BE49-F238E27FC236}">
-                <a16:creationId xmlns:a16="http://schemas.microsoft.com/office/drawing/2014/main" id="{E0CB2EBC-A191-4039-B494-88D8CB3C99BE}"/>
+                <a16:creationId xmlns:a16="http://schemas.microsoft.com/office/drawing/2014/main" id="{F9FDDF8A-3971-4169-8928-39E25BA9B4F4}"/>
               </a:ext>
             </a:extLst>
           </p:cNvPr>
@@ -8064,7 +8064,7 @@
           <p:cNvPr id="7" name="">
             <a:extLst xmlns:a="http://schemas.openxmlformats.org/drawingml/2006/main">
               <a:ext uri="{FF2B5EF4-FFF2-40B4-BE49-F238E27FC236}">
-                <a16:creationId xmlns:a16="http://schemas.microsoft.com/office/drawing/2014/main" id="{BB806A67-B169-43DA-BEB8-D75C64C8B453}"/>
+                <a16:creationId xmlns:a16="http://schemas.microsoft.com/office/drawing/2014/main" id="{56981E7D-410E-410A-9DEB-2BD869B151D4}"/>
               </a:ext>
             </a:extLst>
           </p:cNvPr>
@@ -8096,7 +8096,7 @@
           <p:cNvPr id="8" name="">
             <a:extLst xmlns:a="http://schemas.openxmlformats.org/drawingml/2006/main">
               <a:ext uri="{FF2B5EF4-FFF2-40B4-BE49-F238E27FC236}">
-                <a16:creationId xmlns:a16="http://schemas.microsoft.com/office/drawing/2014/main" id="{17ED8AAB-C298-4178-89FB-5D2F4600FD86}"/>
+                <a16:creationId xmlns:a16="http://schemas.microsoft.com/office/drawing/2014/main" id="{E8B2E957-6169-43DA-A217-48D6543B30A5}"/>
               </a:ext>
             </a:extLst>
           </p:cNvPr>
@@ -8153,7 +8153,7 @@
           <p:cNvPr id="9" name="">
             <a:extLst xmlns:a="http://schemas.openxmlformats.org/drawingml/2006/main">
               <a:ext uri="{FF2B5EF4-FFF2-40B4-BE49-F238E27FC236}">
-                <a16:creationId xmlns:a16="http://schemas.microsoft.com/office/drawing/2014/main" id="{03B90AB0-115A-478C-BFF5-0F25BC596D1E}"/>
+                <a16:creationId xmlns:a16="http://schemas.microsoft.com/office/drawing/2014/main" id="{A1B49917-4BEC-4E0A-A6FE-52DABD1C3C6C}"/>
               </a:ext>
             </a:extLst>
           </p:cNvPr>
@@ -8210,19 +8210,19 @@
           <p:cNvPr id="10" name="">
             <a:extLst xmlns:a="http://schemas.openxmlformats.org/drawingml/2006/main">
               <a:ext uri="{FF2B5EF4-FFF2-40B4-BE49-F238E27FC236}">
-                <a16:creationId xmlns:a16="http://schemas.microsoft.com/office/drawing/2014/main" id="{2EBB17CD-0730-4BD1-8D48-12DC7E9B4CE7}"/>
-              </a:ext>
-            </a:extLst>
-          </p:cNvPr>
-          <p:cNvSpPr>
-            <a:spLocks xmlns:a="http://schemas.openxmlformats.org/drawingml/2006/main" noGrp="1"/>
-          </p:cNvSpPr>
-          <p:nvPr/>
-        </p:nvSpPr>
-        <p:spPr>
-          <a:xfrm xmlns:a="http://schemas.openxmlformats.org/drawingml/2006/main">
-            <a:off x="914400" y="1257300"/>
-            <a:ext cx="10363200" cy="781050"/>
+                <a16:creationId xmlns:a16="http://schemas.microsoft.com/office/drawing/2014/main" id="{51192433-FE7A-4C02-BF8B-DE62CC01307F}"/>
+              </a:ext>
+            </a:extLst>
+          </p:cNvPr>
+          <p:cNvSpPr>
+            <a:spLocks xmlns:a="http://schemas.openxmlformats.org/drawingml/2006/main" noGrp="1"/>
+          </p:cNvSpPr>
+          <p:nvPr/>
+        </p:nvSpPr>
+        <p:spPr>
+          <a:xfrm xmlns:a="http://schemas.openxmlformats.org/drawingml/2006/main">
+            <a:off x="857250" y="1219200"/>
+            <a:ext cx="10477500" cy="742950"/>
           </a:xfrm>
           <a:prstGeom xmlns:a="http://schemas.openxmlformats.org/drawingml/2006/main" prst="rect">
             <a:avLst/>
@@ -8239,7 +8239,7 @@
           <a:lstStyle xmlns:a="http://schemas.openxmlformats.org/drawingml/2006/main"/>
           <a:p xmlns:a="http://schemas.openxmlformats.org/drawingml/2006/main">
             <a:pPr algn="ctr">
-              <a:defRPr sz="2175" b="1">
+              <a:defRPr sz="2100" b="1">
                 <a:solidFill>
                   <a:srgbClr val="17253A"/>
                 </a:solidFill>
@@ -8249,7 +8249,7 @@
               </a:defRPr>
             </a:pPr>
             <a:r>
-              <a:rPr sz="2175" b="1">
+              <a:rPr sz="2100" b="1">
                 <a:solidFill>
                   <a:srgbClr val="17253A"/>
                 </a:solidFill>
@@ -8267,28 +8267,30 @@
           <p:cNvPr id="11" name="">
             <a:extLst xmlns:a="http://schemas.openxmlformats.org/drawingml/2006/main">
               <a:ext uri="{FF2B5EF4-FFF2-40B4-BE49-F238E27FC236}">
-                <a16:creationId xmlns:a16="http://schemas.microsoft.com/office/drawing/2014/main" id="{CE3288EB-954B-4D9C-BA0B-EBF86DF57F8C}"/>
-              </a:ext>
-            </a:extLst>
-          </p:cNvPr>
-          <p:cNvSpPr>
-            <a:spLocks xmlns:a="http://schemas.openxmlformats.org/drawingml/2006/main" noGrp="1"/>
-          </p:cNvSpPr>
-          <p:nvPr/>
-        </p:nvSpPr>
-        <p:spPr>
-          <a:xfrm xmlns:a="http://schemas.openxmlformats.org/drawingml/2006/main">
-            <a:off x="1000125" y="2247900"/>
-            <a:ext cx="476250" cy="476250"/>
-          </a:xfrm>
-          <a:prstGeom xmlns:a="http://schemas.openxmlformats.org/drawingml/2006/main" prst="ellipse">
+                <a16:creationId xmlns:a16="http://schemas.microsoft.com/office/drawing/2014/main" id="{DE38C8A5-12B4-461E-93AE-1F15543A8CFB}"/>
+              </a:ext>
+            </a:extLst>
+          </p:cNvPr>
+          <p:cNvSpPr>
+            <a:spLocks xmlns:a="http://schemas.openxmlformats.org/drawingml/2006/main" noGrp="1"/>
+          </p:cNvSpPr>
+          <p:nvPr/>
+        </p:nvSpPr>
+        <p:spPr>
+          <a:xfrm xmlns:a="http://schemas.openxmlformats.org/drawingml/2006/main">
+            <a:off x="971550" y="2124075"/>
+            <a:ext cx="38100" cy="3524250"/>
+          </a:xfrm>
+          <a:prstGeom xmlns:a="http://schemas.openxmlformats.org/drawingml/2006/main" prst="rect">
             <a:avLst/>
           </a:prstGeom>
           <a:solidFill xmlns:a="http://schemas.openxmlformats.org/drawingml/2006/main">
-            <a:srgbClr val="18324A"/>
+            <a:srgbClr val="2C6E73"/>
           </a:solidFill>
           <a:ln xmlns:a="http://schemas.openxmlformats.org/drawingml/2006/main" w="0">
-            <a:noFill/>
+            <a:solidFill>
+              <a:srgbClr val="2C6E73"/>
+            </a:solidFill>
           </a:ln>
         </p:spPr>
       </p:sp>
@@ -8297,19 +8299,19 @@
           <p:cNvPr id="12" name="">
             <a:extLst xmlns:a="http://schemas.openxmlformats.org/drawingml/2006/main">
               <a:ext uri="{FF2B5EF4-FFF2-40B4-BE49-F238E27FC236}">
-                <a16:creationId xmlns:a16="http://schemas.microsoft.com/office/drawing/2014/main" id="{6A995081-F831-4DA5-AC2A-A5A4362A9685}"/>
-              </a:ext>
-            </a:extLst>
-          </p:cNvPr>
-          <p:cNvSpPr>
-            <a:spLocks xmlns:a="http://schemas.openxmlformats.org/drawingml/2006/main" noGrp="1"/>
-          </p:cNvSpPr>
-          <p:nvPr/>
-        </p:nvSpPr>
-        <p:spPr>
-          <a:xfrm xmlns:a="http://schemas.openxmlformats.org/drawingml/2006/main">
-            <a:off x="1000125" y="2276475"/>
-            <a:ext cx="476250" cy="419100"/>
+                <a16:creationId xmlns:a16="http://schemas.microsoft.com/office/drawing/2014/main" id="{6ED1CC2A-1451-44AA-B040-53573A8DA0B5}"/>
+              </a:ext>
+            </a:extLst>
+          </p:cNvPr>
+          <p:cNvSpPr>
+            <a:spLocks xmlns:a="http://schemas.openxmlformats.org/drawingml/2006/main" noGrp="1"/>
+          </p:cNvSpPr>
+          <p:nvPr/>
+        </p:nvSpPr>
+        <p:spPr>
+          <a:xfrm xmlns:a="http://schemas.openxmlformats.org/drawingml/2006/main">
+            <a:off x="1162050" y="2200275"/>
+            <a:ext cx="400050" cy="400050"/>
           </a:xfrm>
           <a:prstGeom xmlns:a="http://schemas.openxmlformats.org/drawingml/2006/main" prst="rect">
             <a:avLst/>
@@ -8326,9 +8328,9 @@
           <a:lstStyle xmlns:a="http://schemas.openxmlformats.org/drawingml/2006/main"/>
           <a:p xmlns:a="http://schemas.openxmlformats.org/drawingml/2006/main">
             <a:pPr algn="ctr">
-              <a:defRPr sz="1350" b="1">
-                <a:solidFill>
-                  <a:srgbClr val="FFFFFF"/>
+              <a:defRPr sz="1125" b="1">
+                <a:solidFill>
+                  <a:srgbClr val="2C6E73"/>
                 </a:solidFill>
                 <a:latin typeface="Arial"/>
                 <a:ea typeface="Arial"/>
@@ -8336,9 +8338,9 @@
               </a:defRPr>
             </a:pPr>
             <a:r>
-              <a:rPr sz="1350" b="1">
-                <a:solidFill>
-                  <a:srgbClr val="FFFFFF"/>
+              <a:rPr sz="1125" b="1">
+                <a:solidFill>
+                  <a:srgbClr val="2C6E73"/>
                 </a:solidFill>
                 <a:latin typeface="Arial"/>
                 <a:ea typeface="Arial"/>
@@ -8354,19 +8356,19 @@
           <p:cNvPr id="13" name="">
             <a:extLst xmlns:a="http://schemas.openxmlformats.org/drawingml/2006/main">
               <a:ext uri="{FF2B5EF4-FFF2-40B4-BE49-F238E27FC236}">
-                <a16:creationId xmlns:a16="http://schemas.microsoft.com/office/drawing/2014/main" id="{F8DCFD82-1FC5-4154-8127-667D6524D523}"/>
-              </a:ext>
-            </a:extLst>
-          </p:cNvPr>
-          <p:cNvSpPr>
-            <a:spLocks xmlns:a="http://schemas.openxmlformats.org/drawingml/2006/main" noGrp="1"/>
-          </p:cNvSpPr>
-          <p:nvPr/>
-        </p:nvSpPr>
-        <p:spPr>
-          <a:xfrm xmlns:a="http://schemas.openxmlformats.org/drawingml/2006/main">
-            <a:off x="1714500" y="2181225"/>
-            <a:ext cx="9429750" cy="609600"/>
+                <a16:creationId xmlns:a16="http://schemas.microsoft.com/office/drawing/2014/main" id="{4D73CB1B-107D-4D86-932E-1B1471CEA906}"/>
+              </a:ext>
+            </a:extLst>
+          </p:cNvPr>
+          <p:cNvSpPr>
+            <a:spLocks xmlns:a="http://schemas.openxmlformats.org/drawingml/2006/main" noGrp="1"/>
+          </p:cNvSpPr>
+          <p:nvPr/>
+        </p:nvSpPr>
+        <p:spPr>
+          <a:xfrm xmlns:a="http://schemas.openxmlformats.org/drawingml/2006/main">
+            <a:off x="1714500" y="2114550"/>
+            <a:ext cx="9525000" cy="809625"/>
           </a:xfrm>
           <a:prstGeom xmlns:a="http://schemas.openxmlformats.org/drawingml/2006/main" prst="rect">
             <a:avLst/>
@@ -8383,7 +8385,7 @@
           <a:lstStyle xmlns:a="http://schemas.openxmlformats.org/drawingml/2006/main"/>
           <a:p xmlns:a="http://schemas.openxmlformats.org/drawingml/2006/main">
             <a:pPr algn="l">
-              <a:defRPr sz="1500" b="0">
+              <a:defRPr sz="1725" b="0">
                 <a:solidFill>
                   <a:srgbClr val="17253A"/>
                 </a:solidFill>
@@ -8393,7 +8395,7 @@
               </a:defRPr>
             </a:pPr>
             <a:r>
-              <a:rPr sz="1500" b="0">
+              <a:rPr sz="1725" b="0">
                 <a:solidFill>
                   <a:srgbClr val="17253A"/>
                 </a:solidFill>
@@ -8401,7 +8403,7 @@
                 <a:ea typeface="Arial"/>
                 <a:cs typeface="Arial"/>
               </a:rPr>
-              <a:t>Identify the structure: Choose a representation out of 100 or use division.</a:t>
+              <a:t>0.625</a:t>
             </a:r>
           </a:p>
         </p:txBody>
@@ -8411,28 +8413,30 @@
           <p:cNvPr id="14" name="">
             <a:extLst xmlns:a="http://schemas.openxmlformats.org/drawingml/2006/main">
               <a:ext uri="{FF2B5EF4-FFF2-40B4-BE49-F238E27FC236}">
-                <a16:creationId xmlns:a16="http://schemas.microsoft.com/office/drawing/2014/main" id="{227D3297-26AA-4A00-9178-D999DE3D11C8}"/>
-              </a:ext>
-            </a:extLst>
-          </p:cNvPr>
-          <p:cNvSpPr>
-            <a:spLocks xmlns:a="http://schemas.openxmlformats.org/drawingml/2006/main" noGrp="1"/>
-          </p:cNvSpPr>
-          <p:nvPr/>
-        </p:nvSpPr>
-        <p:spPr>
-          <a:xfrm xmlns:a="http://schemas.openxmlformats.org/drawingml/2006/main">
-            <a:off x="1000125" y="2990850"/>
-            <a:ext cx="476250" cy="476250"/>
-          </a:xfrm>
-          <a:prstGeom xmlns:a="http://schemas.openxmlformats.org/drawingml/2006/main" prst="ellipse">
+                <a16:creationId xmlns:a16="http://schemas.microsoft.com/office/drawing/2014/main" id="{68897BCA-9921-4207-A4E3-32AE343BC06B}"/>
+              </a:ext>
+            </a:extLst>
+          </p:cNvPr>
+          <p:cNvSpPr>
+            <a:spLocks xmlns:a="http://schemas.openxmlformats.org/drawingml/2006/main" noGrp="1"/>
+          </p:cNvSpPr>
+          <p:nvPr/>
+        </p:nvSpPr>
+        <p:spPr>
+          <a:xfrm xmlns:a="http://schemas.openxmlformats.org/drawingml/2006/main">
+            <a:off x="1714500" y="2943225"/>
+            <a:ext cx="9334500" cy="9525"/>
+          </a:xfrm>
+          <a:prstGeom xmlns:a="http://schemas.openxmlformats.org/drawingml/2006/main" prst="rect">
             <a:avLst/>
           </a:prstGeom>
           <a:solidFill xmlns:a="http://schemas.openxmlformats.org/drawingml/2006/main">
-            <a:srgbClr val="2C6E73"/>
+            <a:srgbClr val="D9E0E6"/>
           </a:solidFill>
           <a:ln xmlns:a="http://schemas.openxmlformats.org/drawingml/2006/main" w="0">
-            <a:noFill/>
+            <a:solidFill>
+              <a:srgbClr val="D9E0E6"/>
+            </a:solidFill>
           </a:ln>
         </p:spPr>
       </p:sp>
@@ -8441,19 +8445,19 @@
           <p:cNvPr id="15" name="">
             <a:extLst xmlns:a="http://schemas.openxmlformats.org/drawingml/2006/main">
               <a:ext uri="{FF2B5EF4-FFF2-40B4-BE49-F238E27FC236}">
-                <a16:creationId xmlns:a16="http://schemas.microsoft.com/office/drawing/2014/main" id="{C7FF82F0-EBBF-48FC-98E0-3D6889C17B49}"/>
-              </a:ext>
-            </a:extLst>
-          </p:cNvPr>
-          <p:cNvSpPr>
-            <a:spLocks xmlns:a="http://schemas.openxmlformats.org/drawingml/2006/main" noGrp="1"/>
-          </p:cNvSpPr>
-          <p:nvPr/>
-        </p:nvSpPr>
-        <p:spPr>
-          <a:xfrm xmlns:a="http://schemas.openxmlformats.org/drawingml/2006/main">
-            <a:off x="1000125" y="3019425"/>
-            <a:ext cx="476250" cy="419100"/>
+                <a16:creationId xmlns:a16="http://schemas.microsoft.com/office/drawing/2014/main" id="{36B0425A-B6BE-4A46-915C-7BA023040BF8}"/>
+              </a:ext>
+            </a:extLst>
+          </p:cNvPr>
+          <p:cNvSpPr>
+            <a:spLocks xmlns:a="http://schemas.openxmlformats.org/drawingml/2006/main" noGrp="1"/>
+          </p:cNvSpPr>
+          <p:nvPr/>
+        </p:nvSpPr>
+        <p:spPr>
+          <a:xfrm xmlns:a="http://schemas.openxmlformats.org/drawingml/2006/main">
+            <a:off x="1162050" y="3076575"/>
+            <a:ext cx="400050" cy="400050"/>
           </a:xfrm>
           <a:prstGeom xmlns:a="http://schemas.openxmlformats.org/drawingml/2006/main" prst="rect">
             <a:avLst/>
@@ -8470,9 +8474,9 @@
           <a:lstStyle xmlns:a="http://schemas.openxmlformats.org/drawingml/2006/main"/>
           <a:p xmlns:a="http://schemas.openxmlformats.org/drawingml/2006/main">
             <a:pPr algn="ctr">
-              <a:defRPr sz="1350" b="1">
-                <a:solidFill>
-                  <a:srgbClr val="FFFFFF"/>
+              <a:defRPr sz="1125" b="1">
+                <a:solidFill>
+                  <a:srgbClr val="2C6E73"/>
                 </a:solidFill>
                 <a:latin typeface="Arial"/>
                 <a:ea typeface="Arial"/>
@@ -8480,9 +8484,9 @@
               </a:defRPr>
             </a:pPr>
             <a:r>
-              <a:rPr sz="1350" b="1">
-                <a:solidFill>
-                  <a:srgbClr val="FFFFFF"/>
+              <a:rPr sz="1125" b="1">
+                <a:solidFill>
+                  <a:srgbClr val="2C6E73"/>
                 </a:solidFill>
                 <a:latin typeface="Arial"/>
                 <a:ea typeface="Arial"/>
@@ -8498,19 +8502,19 @@
           <p:cNvPr id="16" name="">
             <a:extLst xmlns:a="http://schemas.openxmlformats.org/drawingml/2006/main">
               <a:ext uri="{FF2B5EF4-FFF2-40B4-BE49-F238E27FC236}">
-                <a16:creationId xmlns:a16="http://schemas.microsoft.com/office/drawing/2014/main" id="{FFF86A7B-3E88-4688-B990-9C8832D615C7}"/>
-              </a:ext>
-            </a:extLst>
-          </p:cNvPr>
-          <p:cNvSpPr>
-            <a:spLocks xmlns:a="http://schemas.openxmlformats.org/drawingml/2006/main" noGrp="1"/>
-          </p:cNvSpPr>
-          <p:nvPr/>
-        </p:nvSpPr>
-        <p:spPr>
-          <a:xfrm xmlns:a="http://schemas.openxmlformats.org/drawingml/2006/main">
-            <a:off x="1714500" y="2924175"/>
-            <a:ext cx="9429750" cy="609600"/>
+                <a16:creationId xmlns:a16="http://schemas.microsoft.com/office/drawing/2014/main" id="{0B06DE37-6E9D-4639-879B-27DCEAF62094}"/>
+              </a:ext>
+            </a:extLst>
+          </p:cNvPr>
+          <p:cNvSpPr>
+            <a:spLocks xmlns:a="http://schemas.openxmlformats.org/drawingml/2006/main" noGrp="1"/>
+          </p:cNvSpPr>
+          <p:nvPr/>
+        </p:nvSpPr>
+        <p:spPr>
+          <a:xfrm xmlns:a="http://schemas.openxmlformats.org/drawingml/2006/main">
+            <a:off x="1714500" y="2990850"/>
+            <a:ext cx="9525000" cy="809625"/>
           </a:xfrm>
           <a:prstGeom xmlns:a="http://schemas.openxmlformats.org/drawingml/2006/main" prst="rect">
             <a:avLst/>
@@ -8527,7 +8531,7 @@
           <a:lstStyle xmlns:a="http://schemas.openxmlformats.org/drawingml/2006/main"/>
           <a:p xmlns:a="http://schemas.openxmlformats.org/drawingml/2006/main">
             <a:pPr algn="l">
-              <a:defRPr sz="1500" b="0">
+              <a:defRPr sz="1725" b="0">
                 <a:solidFill>
                   <a:srgbClr val="17253A"/>
                 </a:solidFill>
@@ -8537,7 +8541,7 @@
               </a:defRPr>
             </a:pPr>
             <a:r>
-              <a:rPr sz="1500" b="0">
+              <a:rPr sz="1725" b="0">
                 <a:solidFill>
                   <a:srgbClr val="17253A"/>
                 </a:solidFill>
@@ -8545,7 +8549,7 @@
                 <a:ea typeface="Arial"/>
                 <a:cs typeface="Arial"/>
               </a:rPr>
-              <a:t>Set up the method: Convert carefully while preserving the value.</a:t>
+              <a:t>0.625 × 100</a:t>
             </a:r>
           </a:p>
         </p:txBody>
@@ -8555,28 +8559,30 @@
           <p:cNvPr id="17" name="">
             <a:extLst xmlns:a="http://schemas.openxmlformats.org/drawingml/2006/main">
               <a:ext uri="{FF2B5EF4-FFF2-40B4-BE49-F238E27FC236}">
-                <a16:creationId xmlns:a16="http://schemas.microsoft.com/office/drawing/2014/main" id="{1B8E931A-8B65-4087-9571-F4FA81939A28}"/>
-              </a:ext>
-            </a:extLst>
-          </p:cNvPr>
-          <p:cNvSpPr>
-            <a:spLocks xmlns:a="http://schemas.openxmlformats.org/drawingml/2006/main" noGrp="1"/>
-          </p:cNvSpPr>
-          <p:nvPr/>
-        </p:nvSpPr>
-        <p:spPr>
-          <a:xfrm xmlns:a="http://schemas.openxmlformats.org/drawingml/2006/main">
-            <a:off x="1000125" y="3733800"/>
-            <a:ext cx="476250" cy="476250"/>
-          </a:xfrm>
-          <a:prstGeom xmlns:a="http://schemas.openxmlformats.org/drawingml/2006/main" prst="ellipse">
+                <a16:creationId xmlns:a16="http://schemas.microsoft.com/office/drawing/2014/main" id="{86A4071A-EB5B-4737-AFC5-1803357573D4}"/>
+              </a:ext>
+            </a:extLst>
+          </p:cNvPr>
+          <p:cNvSpPr>
+            <a:spLocks xmlns:a="http://schemas.openxmlformats.org/drawingml/2006/main" noGrp="1"/>
+          </p:cNvSpPr>
+          <p:nvPr/>
+        </p:nvSpPr>
+        <p:spPr>
+          <a:xfrm xmlns:a="http://schemas.openxmlformats.org/drawingml/2006/main">
+            <a:off x="1714500" y="3819525"/>
+            <a:ext cx="9334500" cy="9525"/>
+          </a:xfrm>
+          <a:prstGeom xmlns:a="http://schemas.openxmlformats.org/drawingml/2006/main" prst="rect">
             <a:avLst/>
           </a:prstGeom>
           <a:solidFill xmlns:a="http://schemas.openxmlformats.org/drawingml/2006/main">
-            <a:srgbClr val="2C6E73"/>
+            <a:srgbClr val="D9E0E6"/>
           </a:solidFill>
           <a:ln xmlns:a="http://schemas.openxmlformats.org/drawingml/2006/main" w="0">
-            <a:noFill/>
+            <a:solidFill>
+              <a:srgbClr val="D9E0E6"/>
+            </a:solidFill>
           </a:ln>
         </p:spPr>
       </p:sp>
@@ -8585,19 +8591,19 @@
           <p:cNvPr id="18" name="">
             <a:extLst xmlns:a="http://schemas.openxmlformats.org/drawingml/2006/main">
               <a:ext uri="{FF2B5EF4-FFF2-40B4-BE49-F238E27FC236}">
-                <a16:creationId xmlns:a16="http://schemas.microsoft.com/office/drawing/2014/main" id="{87554898-9D72-4D01-B2D3-8B3CD1D1E42C}"/>
-              </a:ext>
-            </a:extLst>
-          </p:cNvPr>
-          <p:cNvSpPr>
-            <a:spLocks xmlns:a="http://schemas.openxmlformats.org/drawingml/2006/main" noGrp="1"/>
-          </p:cNvSpPr>
-          <p:nvPr/>
-        </p:nvSpPr>
-        <p:spPr>
-          <a:xfrm xmlns:a="http://schemas.openxmlformats.org/drawingml/2006/main">
-            <a:off x="1000125" y="3762375"/>
-            <a:ext cx="476250" cy="419100"/>
+                <a16:creationId xmlns:a16="http://schemas.microsoft.com/office/drawing/2014/main" id="{392C0226-1A64-4BA8-A460-62C6E2EA9D59}"/>
+              </a:ext>
+            </a:extLst>
+          </p:cNvPr>
+          <p:cNvSpPr>
+            <a:spLocks xmlns:a="http://schemas.openxmlformats.org/drawingml/2006/main" noGrp="1"/>
+          </p:cNvSpPr>
+          <p:nvPr/>
+        </p:nvSpPr>
+        <p:spPr>
+          <a:xfrm xmlns:a="http://schemas.openxmlformats.org/drawingml/2006/main">
+            <a:off x="1162050" y="3952875"/>
+            <a:ext cx="400050" cy="400050"/>
           </a:xfrm>
           <a:prstGeom xmlns:a="http://schemas.openxmlformats.org/drawingml/2006/main" prst="rect">
             <a:avLst/>
@@ -8614,9 +8620,9 @@
           <a:lstStyle xmlns:a="http://schemas.openxmlformats.org/drawingml/2006/main"/>
           <a:p xmlns:a="http://schemas.openxmlformats.org/drawingml/2006/main">
             <a:pPr algn="ctr">
-              <a:defRPr sz="1350" b="1">
-                <a:solidFill>
-                  <a:srgbClr val="FFFFFF"/>
+              <a:defRPr sz="1125" b="1">
+                <a:solidFill>
+                  <a:srgbClr val="2C6E73"/>
                 </a:solidFill>
                 <a:latin typeface="Arial"/>
                 <a:ea typeface="Arial"/>
@@ -8624,9 +8630,9 @@
               </a:defRPr>
             </a:pPr>
             <a:r>
-              <a:rPr sz="1350" b="1">
-                <a:solidFill>
-                  <a:srgbClr val="FFFFFF"/>
+              <a:rPr sz="1125" b="1">
+                <a:solidFill>
+                  <a:srgbClr val="2C6E73"/>
                 </a:solidFill>
                 <a:latin typeface="Arial"/>
                 <a:ea typeface="Arial"/>
@@ -8642,19 +8648,19 @@
           <p:cNvPr id="19" name="">
             <a:extLst xmlns:a="http://schemas.openxmlformats.org/drawingml/2006/main">
               <a:ext uri="{FF2B5EF4-FFF2-40B4-BE49-F238E27FC236}">
-                <a16:creationId xmlns:a16="http://schemas.microsoft.com/office/drawing/2014/main" id="{B950701C-17A6-4D70-A642-743792A65D52}"/>
-              </a:ext>
-            </a:extLst>
-          </p:cNvPr>
-          <p:cNvSpPr>
-            <a:spLocks xmlns:a="http://schemas.openxmlformats.org/drawingml/2006/main" noGrp="1"/>
-          </p:cNvSpPr>
-          <p:nvPr/>
-        </p:nvSpPr>
-        <p:spPr>
-          <a:xfrm xmlns:a="http://schemas.openxmlformats.org/drawingml/2006/main">
-            <a:off x="1714500" y="3667125"/>
-            <a:ext cx="9429750" cy="609600"/>
+                <a16:creationId xmlns:a16="http://schemas.microsoft.com/office/drawing/2014/main" id="{EDB664E6-E6AF-4BED-9309-A6BA55AD2395}"/>
+              </a:ext>
+            </a:extLst>
+          </p:cNvPr>
+          <p:cNvSpPr>
+            <a:spLocks xmlns:a="http://schemas.openxmlformats.org/drawingml/2006/main" noGrp="1"/>
+          </p:cNvSpPr>
+          <p:nvPr/>
+        </p:nvSpPr>
+        <p:spPr>
+          <a:xfrm xmlns:a="http://schemas.openxmlformats.org/drawingml/2006/main">
+            <a:off x="1714500" y="3867150"/>
+            <a:ext cx="9525000" cy="809625"/>
           </a:xfrm>
           <a:prstGeom xmlns:a="http://schemas.openxmlformats.org/drawingml/2006/main" prst="rect">
             <a:avLst/>
@@ -8671,7 +8677,7 @@
           <a:lstStyle xmlns:a="http://schemas.openxmlformats.org/drawingml/2006/main"/>
           <a:p xmlns:a="http://schemas.openxmlformats.org/drawingml/2006/main">
             <a:pPr algn="l">
-              <a:defRPr sz="1500" b="0">
+              <a:defRPr sz="1725" b="0">
                 <a:solidFill>
                   <a:srgbClr val="17253A"/>
                 </a:solidFill>
@@ -8681,7 +8687,7 @@
               </a:defRPr>
             </a:pPr>
             <a:r>
-              <a:rPr sz="1500" b="0">
+              <a:rPr sz="1725" b="0">
                 <a:solidFill>
                   <a:srgbClr val="17253A"/>
                 </a:solidFill>
@@ -8689,7 +8695,7 @@
                 <a:ea typeface="Arial"/>
                 <a:cs typeface="Arial"/>
               </a:rPr>
-              <a:t>Complete the calculation: 62.5%.</a:t>
+              <a:t>62.5</a:t>
             </a:r>
           </a:p>
         </p:txBody>
@@ -8699,28 +8705,30 @@
           <p:cNvPr id="20" name="">
             <a:extLst xmlns:a="http://schemas.openxmlformats.org/drawingml/2006/main">
               <a:ext uri="{FF2B5EF4-FFF2-40B4-BE49-F238E27FC236}">
-                <a16:creationId xmlns:a16="http://schemas.microsoft.com/office/drawing/2014/main" id="{A9F0897F-D166-4AB0-8E9D-685C453ED6AD}"/>
-              </a:ext>
-            </a:extLst>
-          </p:cNvPr>
-          <p:cNvSpPr>
-            <a:spLocks xmlns:a="http://schemas.openxmlformats.org/drawingml/2006/main" noGrp="1"/>
-          </p:cNvSpPr>
-          <p:nvPr/>
-        </p:nvSpPr>
-        <p:spPr>
-          <a:xfrm xmlns:a="http://schemas.openxmlformats.org/drawingml/2006/main">
-            <a:off x="1000125" y="4476750"/>
-            <a:ext cx="476250" cy="476250"/>
-          </a:xfrm>
-          <a:prstGeom xmlns:a="http://schemas.openxmlformats.org/drawingml/2006/main" prst="ellipse">
+                <a16:creationId xmlns:a16="http://schemas.microsoft.com/office/drawing/2014/main" id="{DCD0F2C1-FC3E-40B6-89B5-6CCD92A43B20}"/>
+              </a:ext>
+            </a:extLst>
+          </p:cNvPr>
+          <p:cNvSpPr>
+            <a:spLocks xmlns:a="http://schemas.openxmlformats.org/drawingml/2006/main" noGrp="1"/>
+          </p:cNvSpPr>
+          <p:nvPr/>
+        </p:nvSpPr>
+        <p:spPr>
+          <a:xfrm xmlns:a="http://schemas.openxmlformats.org/drawingml/2006/main">
+            <a:off x="1714500" y="4695825"/>
+            <a:ext cx="9334500" cy="9525"/>
+          </a:xfrm>
+          <a:prstGeom xmlns:a="http://schemas.openxmlformats.org/drawingml/2006/main" prst="rect">
             <a:avLst/>
           </a:prstGeom>
           <a:solidFill xmlns:a="http://schemas.openxmlformats.org/drawingml/2006/main">
-            <a:srgbClr val="2C6E73"/>
+            <a:srgbClr val="D9E0E6"/>
           </a:solidFill>
           <a:ln xmlns:a="http://schemas.openxmlformats.org/drawingml/2006/main" w="0">
-            <a:noFill/>
+            <a:solidFill>
+              <a:srgbClr val="D9E0E6"/>
+            </a:solidFill>
           </a:ln>
         </p:spPr>
       </p:sp>
@@ -8729,19 +8737,19 @@
           <p:cNvPr id="21" name="">
             <a:extLst xmlns:a="http://schemas.openxmlformats.org/drawingml/2006/main">
               <a:ext uri="{FF2B5EF4-FFF2-40B4-BE49-F238E27FC236}">
-                <a16:creationId xmlns:a16="http://schemas.microsoft.com/office/drawing/2014/main" id="{3CC93ADE-46F7-411A-BC79-0032180F436D}"/>
-              </a:ext>
-            </a:extLst>
-          </p:cNvPr>
-          <p:cNvSpPr>
-            <a:spLocks xmlns:a="http://schemas.openxmlformats.org/drawingml/2006/main" noGrp="1"/>
-          </p:cNvSpPr>
-          <p:nvPr/>
-        </p:nvSpPr>
-        <p:spPr>
-          <a:xfrm xmlns:a="http://schemas.openxmlformats.org/drawingml/2006/main">
-            <a:off x="1000125" y="4505325"/>
-            <a:ext cx="476250" cy="419100"/>
+                <a16:creationId xmlns:a16="http://schemas.microsoft.com/office/drawing/2014/main" id="{B5787691-E028-4D5E-ADC2-7FD9AB8B2594}"/>
+              </a:ext>
+            </a:extLst>
+          </p:cNvPr>
+          <p:cNvSpPr>
+            <a:spLocks xmlns:a="http://schemas.openxmlformats.org/drawingml/2006/main" noGrp="1"/>
+          </p:cNvSpPr>
+          <p:nvPr/>
+        </p:nvSpPr>
+        <p:spPr>
+          <a:xfrm xmlns:a="http://schemas.openxmlformats.org/drawingml/2006/main">
+            <a:off x="1162050" y="4829175"/>
+            <a:ext cx="400050" cy="400050"/>
           </a:xfrm>
           <a:prstGeom xmlns:a="http://schemas.openxmlformats.org/drawingml/2006/main" prst="rect">
             <a:avLst/>
@@ -8758,9 +8766,9 @@
           <a:lstStyle xmlns:a="http://schemas.openxmlformats.org/drawingml/2006/main"/>
           <a:p xmlns:a="http://schemas.openxmlformats.org/drawingml/2006/main">
             <a:pPr algn="ctr">
-              <a:defRPr sz="1350" b="1">
-                <a:solidFill>
-                  <a:srgbClr val="FFFFFF"/>
+              <a:defRPr sz="1125" b="1">
+                <a:solidFill>
+                  <a:srgbClr val="2F785D"/>
                 </a:solidFill>
                 <a:latin typeface="Arial"/>
                 <a:ea typeface="Arial"/>
@@ -8768,9 +8776,9 @@
               </a:defRPr>
             </a:pPr>
             <a:r>
-              <a:rPr sz="1350" b="1">
-                <a:solidFill>
-                  <a:srgbClr val="FFFFFF"/>
+              <a:rPr sz="1125" b="1">
+                <a:solidFill>
+                  <a:srgbClr val="2F785D"/>
                 </a:solidFill>
                 <a:latin typeface="Arial"/>
                 <a:ea typeface="Arial"/>
@@ -8786,19 +8794,19 @@
           <p:cNvPr id="22" name="">
             <a:extLst xmlns:a="http://schemas.openxmlformats.org/drawingml/2006/main">
               <a:ext uri="{FF2B5EF4-FFF2-40B4-BE49-F238E27FC236}">
-                <a16:creationId xmlns:a16="http://schemas.microsoft.com/office/drawing/2014/main" id="{618EB701-FBAD-42CE-8D2B-233B44AD01C0}"/>
-              </a:ext>
-            </a:extLst>
-          </p:cNvPr>
-          <p:cNvSpPr>
-            <a:spLocks xmlns:a="http://schemas.openxmlformats.org/drawingml/2006/main" noGrp="1"/>
-          </p:cNvSpPr>
-          <p:nvPr/>
-        </p:nvSpPr>
-        <p:spPr>
-          <a:xfrm xmlns:a="http://schemas.openxmlformats.org/drawingml/2006/main">
-            <a:off x="1714500" y="4410075"/>
-            <a:ext cx="9429750" cy="609600"/>
+                <a16:creationId xmlns:a16="http://schemas.microsoft.com/office/drawing/2014/main" id="{781CB548-703C-498F-BDD1-009C6474B65F}"/>
+              </a:ext>
+            </a:extLst>
+          </p:cNvPr>
+          <p:cNvSpPr>
+            <a:spLocks xmlns:a="http://schemas.openxmlformats.org/drawingml/2006/main" noGrp="1"/>
+          </p:cNvSpPr>
+          <p:nvPr/>
+        </p:nvSpPr>
+        <p:spPr>
+          <a:xfrm xmlns:a="http://schemas.openxmlformats.org/drawingml/2006/main">
+            <a:off x="1714500" y="4743450"/>
+            <a:ext cx="9525000" cy="809625"/>
           </a:xfrm>
           <a:prstGeom xmlns:a="http://schemas.openxmlformats.org/drawingml/2006/main" prst="rect">
             <a:avLst/>
@@ -8815,7 +8823,7 @@
           <a:lstStyle xmlns:a="http://schemas.openxmlformats.org/drawingml/2006/main"/>
           <a:p xmlns:a="http://schemas.openxmlformats.org/drawingml/2006/main">
             <a:pPr algn="l">
-              <a:defRPr sz="1500" b="1">
+              <a:defRPr sz="1725" b="1">
                 <a:solidFill>
                   <a:srgbClr val="2F785D"/>
                 </a:solidFill>
@@ -8825,7 +8833,7 @@
               </a:defRPr>
             </a:pPr>
             <a:r>
-              <a:rPr sz="1500" b="1">
+              <a:rPr sz="1725" b="1">
                 <a:solidFill>
                   <a:srgbClr val="2F785D"/>
                 </a:solidFill>
@@ -8833,7 +8841,7 @@
                 <a:ea typeface="Arial"/>
                 <a:cs typeface="Arial"/>
               </a:rPr>
-              <a:t>Check the result: Check the three forms against a benchmark such as one half.</a:t>
+              <a:t>0.625 = 62.5%</a:t>
             </a:r>
           </a:p>
         </p:txBody>
@@ -8841,7 +8849,7 @@
     </p:spTree>
     <p:extLst>
       <p:ext uri="{BB962C8B-B14F-4D97-AF65-F5344CB8AC3E}">
-        <p14:creationId xmlns:p14="http://schemas.microsoft.com/office/powerpoint/2010/main" val="1598616575"/>
+        <p14:creationId xmlns:p14="http://schemas.microsoft.com/office/powerpoint/2010/main" val="491264629"/>
       </p:ext>
     </p:extLst>
   </p:cSld>
@@ -9134,7 +9142,7 @@
           <p:cNvPr id="15" name="">
             <a:extLst xmlns:a="http://schemas.openxmlformats.org/drawingml/2006/main">
               <a:ext uri="{FF2B5EF4-FFF2-40B4-BE49-F238E27FC236}">
-                <a16:creationId xmlns:a16="http://schemas.microsoft.com/office/drawing/2014/main" id="{79B92DFC-9B5E-45DA-ABBA-20F19D30FD01}"/>
+                <a16:creationId xmlns:a16="http://schemas.microsoft.com/office/drawing/2014/main" id="{05BAA367-80B1-45AB-A781-E259626B718F}"/>
               </a:ext>
             </a:extLst>
           </p:cNvPr>
@@ -9166,7 +9174,7 @@
           <p:cNvPr id="2" name="">
             <a:extLst xmlns:a="http://schemas.openxmlformats.org/drawingml/2006/main">
               <a:ext uri="{FF2B5EF4-FFF2-40B4-BE49-F238E27FC236}">
-                <a16:creationId xmlns:a16="http://schemas.microsoft.com/office/drawing/2014/main" id="{2FF5F275-D381-4B99-952B-BA7EF514BB8B}"/>
+                <a16:creationId xmlns:a16="http://schemas.microsoft.com/office/drawing/2014/main" id="{20BDFF79-9DD0-49C7-AA33-BF5B409CFE56}"/>
               </a:ext>
             </a:extLst>
           </p:cNvPr>
@@ -9223,7 +9231,7 @@
           <p:cNvPr id="3" name="">
             <a:extLst xmlns:a="http://schemas.openxmlformats.org/drawingml/2006/main">
               <a:ext uri="{FF2B5EF4-FFF2-40B4-BE49-F238E27FC236}">
-                <a16:creationId xmlns:a16="http://schemas.microsoft.com/office/drawing/2014/main" id="{C4095841-24D3-4E46-BBA7-28704AEF9C57}"/>
+                <a16:creationId xmlns:a16="http://schemas.microsoft.com/office/drawing/2014/main" id="{F317EFAD-44F1-4ED4-B0F1-3E7B7ADADCC0}"/>
               </a:ext>
             </a:extLst>
           </p:cNvPr>
@@ -9255,7 +9263,7 @@
           <p:cNvPr id="4" name="">
             <a:extLst xmlns:a="http://schemas.openxmlformats.org/drawingml/2006/main">
               <a:ext uri="{FF2B5EF4-FFF2-40B4-BE49-F238E27FC236}">
-                <a16:creationId xmlns:a16="http://schemas.microsoft.com/office/drawing/2014/main" id="{65C84214-5CBD-4924-9F04-EF770156FA62}"/>
+                <a16:creationId xmlns:a16="http://schemas.microsoft.com/office/drawing/2014/main" id="{3999D978-F5F1-4E47-88D3-1E213F232856}"/>
               </a:ext>
             </a:extLst>
           </p:cNvPr>
@@ -9312,7 +9320,7 @@
           <p:cNvPr id="5" name="">
             <a:extLst xmlns:a="http://schemas.openxmlformats.org/drawingml/2006/main">
               <a:ext uri="{FF2B5EF4-FFF2-40B4-BE49-F238E27FC236}">
-                <a16:creationId xmlns:a16="http://schemas.microsoft.com/office/drawing/2014/main" id="{F7FA01FE-16AE-46D3-82D6-6381D4D6896D}"/>
+                <a16:creationId xmlns:a16="http://schemas.microsoft.com/office/drawing/2014/main" id="{01859E44-D15B-4CC0-BCCA-CA8D89E86082}"/>
               </a:ext>
             </a:extLst>
           </p:cNvPr>
@@ -9369,7 +9377,7 @@
           <p:cNvPr id="6" name="">
             <a:extLst xmlns:a="http://schemas.openxmlformats.org/drawingml/2006/main">
               <a:ext uri="{FF2B5EF4-FFF2-40B4-BE49-F238E27FC236}">
-                <a16:creationId xmlns:a16="http://schemas.microsoft.com/office/drawing/2014/main" id="{9A4F5EFC-694B-4F96-9A49-83E8F983A68E}"/>
+                <a16:creationId xmlns:a16="http://schemas.microsoft.com/office/drawing/2014/main" id="{1F336DA8-213F-4631-BE12-78357C3467B3}"/>
               </a:ext>
             </a:extLst>
           </p:cNvPr>
@@ -9426,7 +9434,7 @@
           <p:cNvPr id="7" name="">
             <a:extLst xmlns:a="http://schemas.openxmlformats.org/drawingml/2006/main">
               <a:ext uri="{FF2B5EF4-FFF2-40B4-BE49-F238E27FC236}">
-                <a16:creationId xmlns:a16="http://schemas.microsoft.com/office/drawing/2014/main" id="{DC71A3B8-D7F9-427F-928A-DAA22C062B99}"/>
+                <a16:creationId xmlns:a16="http://schemas.microsoft.com/office/drawing/2014/main" id="{9F010E5B-1C8F-4A23-BEF0-8354D18684AD}"/>
               </a:ext>
             </a:extLst>
           </p:cNvPr>
@@ -9458,7 +9466,7 @@
           <p:cNvPr id="8" name="">
             <a:extLst xmlns:a="http://schemas.openxmlformats.org/drawingml/2006/main">
               <a:ext uri="{FF2B5EF4-FFF2-40B4-BE49-F238E27FC236}">
-                <a16:creationId xmlns:a16="http://schemas.microsoft.com/office/drawing/2014/main" id="{4F30A339-0724-4FD6-BBC0-993D82C8F182}"/>
+                <a16:creationId xmlns:a16="http://schemas.microsoft.com/office/drawing/2014/main" id="{60321F89-7008-4B6A-A9B4-B9C5378E7BF6}"/>
               </a:ext>
             </a:extLst>
           </p:cNvPr>
@@ -9515,7 +9523,7 @@
           <p:cNvPr id="9" name="">
             <a:extLst xmlns:a="http://schemas.openxmlformats.org/drawingml/2006/main">
               <a:ext uri="{FF2B5EF4-FFF2-40B4-BE49-F238E27FC236}">
-                <a16:creationId xmlns:a16="http://schemas.microsoft.com/office/drawing/2014/main" id="{61A26AA4-FE5F-4780-BB76-7B28D05797D9}"/>
+                <a16:creationId xmlns:a16="http://schemas.microsoft.com/office/drawing/2014/main" id="{46DB53AE-4CEE-429F-9F3C-54F66F5161D7}"/>
               </a:ext>
             </a:extLst>
           </p:cNvPr>
@@ -9572,7 +9580,7 @@
           <p:cNvPr id="10" name="">
             <a:extLst xmlns:a="http://schemas.openxmlformats.org/drawingml/2006/main">
               <a:ext uri="{FF2B5EF4-FFF2-40B4-BE49-F238E27FC236}">
-                <a16:creationId xmlns:a16="http://schemas.microsoft.com/office/drawing/2014/main" id="{7DD0E195-FF4B-4980-BC5A-551413ECEEDB}"/>
+                <a16:creationId xmlns:a16="http://schemas.microsoft.com/office/drawing/2014/main" id="{3DB9B04B-7875-450D-9459-38416CA6FDBA}"/>
               </a:ext>
             </a:extLst>
           </p:cNvPr>
@@ -9629,7 +9637,7 @@
           <p:cNvPr id="11" name="">
             <a:extLst xmlns:a="http://schemas.openxmlformats.org/drawingml/2006/main">
               <a:ext uri="{FF2B5EF4-FFF2-40B4-BE49-F238E27FC236}">
-                <a16:creationId xmlns:a16="http://schemas.microsoft.com/office/drawing/2014/main" id="{EDFC40CC-418B-4C2D-9698-28FA8478E4A9}"/>
+                <a16:creationId xmlns:a16="http://schemas.microsoft.com/office/drawing/2014/main" id="{D53C35E9-D2B2-49E1-B410-378892F1C124}"/>
               </a:ext>
             </a:extLst>
           </p:cNvPr>
@@ -9686,7 +9694,7 @@
           <p:cNvPr id="12" name="">
             <a:extLst xmlns:a="http://schemas.openxmlformats.org/drawingml/2006/main">
               <a:ext uri="{FF2B5EF4-FFF2-40B4-BE49-F238E27FC236}">
-                <a16:creationId xmlns:a16="http://schemas.microsoft.com/office/drawing/2014/main" id="{57B96DB1-2F05-4B67-8FDF-6571648D8A9C}"/>
+                <a16:creationId xmlns:a16="http://schemas.microsoft.com/office/drawing/2014/main" id="{6FAE65BC-5147-41AE-88AD-FF2EA6938822}"/>
               </a:ext>
             </a:extLst>
           </p:cNvPr>
@@ -9718,7 +9726,7 @@
           <p:cNvPr id="13" name="">
             <a:extLst xmlns:a="http://schemas.openxmlformats.org/drawingml/2006/main">
               <a:ext uri="{FF2B5EF4-FFF2-40B4-BE49-F238E27FC236}">
-                <a16:creationId xmlns:a16="http://schemas.microsoft.com/office/drawing/2014/main" id="{EFCDACC7-881B-4812-9311-2AF740E2CB10}"/>
+                <a16:creationId xmlns:a16="http://schemas.microsoft.com/office/drawing/2014/main" id="{7DB2C200-6FF3-4871-9962-666E3BCD2FBB}"/>
               </a:ext>
             </a:extLst>
           </p:cNvPr>
@@ -9775,7 +9783,7 @@
           <p:cNvPr id="14" name="">
             <a:extLst xmlns:a="http://schemas.openxmlformats.org/drawingml/2006/main">
               <a:ext uri="{FF2B5EF4-FFF2-40B4-BE49-F238E27FC236}">
-                <a16:creationId xmlns:a16="http://schemas.microsoft.com/office/drawing/2014/main" id="{1DAD1A59-6B53-45D9-AF7A-65D5374DC21E}"/>
+                <a16:creationId xmlns:a16="http://schemas.microsoft.com/office/drawing/2014/main" id="{D5AFEFC5-858A-4ED8-9AAE-62B41B6D010D}"/>
               </a:ext>
             </a:extLst>
           </p:cNvPr>
@@ -9830,7 +9838,7 @@
     </p:spTree>
     <p:extLst>
       <p:ext uri="{BB962C8B-B14F-4D97-AF65-F5344CB8AC3E}">
-        <p14:creationId xmlns:p14="http://schemas.microsoft.com/office/powerpoint/2010/main" val="183611600"/>
+        <p14:creationId xmlns:p14="http://schemas.microsoft.com/office/powerpoint/2010/main" val="1267146983"/>
       </p:ext>
     </p:extLst>
   </p:cSld>
@@ -10031,7 +10039,7 @@
           <p:cNvPr id="16" name="">
             <a:extLst xmlns:a="http://schemas.openxmlformats.org/drawingml/2006/main">
               <a:ext uri="{FF2B5EF4-FFF2-40B4-BE49-F238E27FC236}">
-                <a16:creationId xmlns:a16="http://schemas.microsoft.com/office/drawing/2014/main" id="{CD78B44E-5434-480B-ABBA-A998306B598A}"/>
+                <a16:creationId xmlns:a16="http://schemas.microsoft.com/office/drawing/2014/main" id="{847C118E-E433-4474-9960-2FF56E5B68E2}"/>
               </a:ext>
             </a:extLst>
           </p:cNvPr>
@@ -10063,7 +10071,7 @@
           <p:cNvPr id="2" name="">
             <a:extLst xmlns:a="http://schemas.openxmlformats.org/drawingml/2006/main">
               <a:ext uri="{FF2B5EF4-FFF2-40B4-BE49-F238E27FC236}">
-                <a16:creationId xmlns:a16="http://schemas.microsoft.com/office/drawing/2014/main" id="{C0523D36-2356-4868-A52E-E988E933C81E}"/>
+                <a16:creationId xmlns:a16="http://schemas.microsoft.com/office/drawing/2014/main" id="{F08EDC84-6DA7-474C-B0E4-D24D6116502F}"/>
               </a:ext>
             </a:extLst>
           </p:cNvPr>
@@ -10120,7 +10128,7 @@
           <p:cNvPr id="3" name="">
             <a:extLst xmlns:a="http://schemas.openxmlformats.org/drawingml/2006/main">
               <a:ext uri="{FF2B5EF4-FFF2-40B4-BE49-F238E27FC236}">
-                <a16:creationId xmlns:a16="http://schemas.microsoft.com/office/drawing/2014/main" id="{37215DF5-A641-4365-9202-AFBE254878C7}"/>
+                <a16:creationId xmlns:a16="http://schemas.microsoft.com/office/drawing/2014/main" id="{7C4CA446-E242-41AB-8CE8-87D41E6EA7D9}"/>
               </a:ext>
             </a:extLst>
           </p:cNvPr>
@@ -10152,7 +10160,7 @@
           <p:cNvPr id="4" name="">
             <a:extLst xmlns:a="http://schemas.openxmlformats.org/drawingml/2006/main">
               <a:ext uri="{FF2B5EF4-FFF2-40B4-BE49-F238E27FC236}">
-                <a16:creationId xmlns:a16="http://schemas.microsoft.com/office/drawing/2014/main" id="{DE1A6EE0-A5B1-47AD-839D-9FE32E48483D}"/>
+                <a16:creationId xmlns:a16="http://schemas.microsoft.com/office/drawing/2014/main" id="{71ECB6ED-73A0-429E-B5D1-18056865630E}"/>
               </a:ext>
             </a:extLst>
           </p:cNvPr>
@@ -10209,7 +10217,7 @@
           <p:cNvPr id="5" name="">
             <a:extLst xmlns:a="http://schemas.openxmlformats.org/drawingml/2006/main">
               <a:ext uri="{FF2B5EF4-FFF2-40B4-BE49-F238E27FC236}">
-                <a16:creationId xmlns:a16="http://schemas.microsoft.com/office/drawing/2014/main" id="{4682AFA9-449D-4F4A-B703-951DF118F0AB}"/>
+                <a16:creationId xmlns:a16="http://schemas.microsoft.com/office/drawing/2014/main" id="{F08E6C27-CFEC-47A3-A490-F8D2B25ECD74}"/>
               </a:ext>
             </a:extLst>
           </p:cNvPr>
@@ -10266,7 +10274,7 @@
           <p:cNvPr id="6" name="">
             <a:extLst xmlns:a="http://schemas.openxmlformats.org/drawingml/2006/main">
               <a:ext uri="{FF2B5EF4-FFF2-40B4-BE49-F238E27FC236}">
-                <a16:creationId xmlns:a16="http://schemas.microsoft.com/office/drawing/2014/main" id="{3B3674FC-E103-41F4-B50B-72C06C2DAC2B}"/>
+                <a16:creationId xmlns:a16="http://schemas.microsoft.com/office/drawing/2014/main" id="{89DEF371-8398-4F04-BDEE-6885DA94908C}"/>
               </a:ext>
             </a:extLst>
           </p:cNvPr>
@@ -10323,7 +10331,7 @@
           <p:cNvPr id="7" name="">
             <a:extLst xmlns:a="http://schemas.openxmlformats.org/drawingml/2006/main">
               <a:ext uri="{FF2B5EF4-FFF2-40B4-BE49-F238E27FC236}">
-                <a16:creationId xmlns:a16="http://schemas.microsoft.com/office/drawing/2014/main" id="{11940A90-4524-4E67-A134-10139D42D0E8}"/>
+                <a16:creationId xmlns:a16="http://schemas.microsoft.com/office/drawing/2014/main" id="{7C8E69E8-A9A6-43AE-892A-005B7DF86F76}"/>
               </a:ext>
             </a:extLst>
           </p:cNvPr>
@@ -10355,7 +10363,7 @@
           <p:cNvPr id="8" name="">
             <a:extLst xmlns:a="http://schemas.openxmlformats.org/drawingml/2006/main">
               <a:ext uri="{FF2B5EF4-FFF2-40B4-BE49-F238E27FC236}">
-                <a16:creationId xmlns:a16="http://schemas.microsoft.com/office/drawing/2014/main" id="{25636406-EB07-4D24-9C8D-074805DEADC9}"/>
+                <a16:creationId xmlns:a16="http://schemas.microsoft.com/office/drawing/2014/main" id="{B1082924-9AB1-44C2-A61D-BC43E781C83A}"/>
               </a:ext>
             </a:extLst>
           </p:cNvPr>
@@ -10412,7 +10420,7 @@
           <p:cNvPr id="9" name="">
             <a:extLst xmlns:a="http://schemas.openxmlformats.org/drawingml/2006/main">
               <a:ext uri="{FF2B5EF4-FFF2-40B4-BE49-F238E27FC236}">
-                <a16:creationId xmlns:a16="http://schemas.microsoft.com/office/drawing/2014/main" id="{6CC6BA56-20A0-4518-B9DD-F0674994834D}"/>
+                <a16:creationId xmlns:a16="http://schemas.microsoft.com/office/drawing/2014/main" id="{D178AA16-D763-4473-9AFF-04935C3F9BDF}"/>
               </a:ext>
             </a:extLst>
           </p:cNvPr>
@@ -10469,7 +10477,7 @@
           <p:cNvPr id="10" name="">
             <a:extLst xmlns:a="http://schemas.openxmlformats.org/drawingml/2006/main">
               <a:ext uri="{FF2B5EF4-FFF2-40B4-BE49-F238E27FC236}">
-                <a16:creationId xmlns:a16="http://schemas.microsoft.com/office/drawing/2014/main" id="{A5AF7D4B-B352-42F1-A7F2-F9ABE957944C}"/>
+                <a16:creationId xmlns:a16="http://schemas.microsoft.com/office/drawing/2014/main" id="{5519C01F-6CE2-4611-B956-FBDD42EA9EC3}"/>
               </a:ext>
             </a:extLst>
           </p:cNvPr>
@@ -10526,7 +10534,7 @@
           <p:cNvPr id="11" name="">
             <a:extLst xmlns:a="http://schemas.openxmlformats.org/drawingml/2006/main">
               <a:ext uri="{FF2B5EF4-FFF2-40B4-BE49-F238E27FC236}">
-                <a16:creationId xmlns:a16="http://schemas.microsoft.com/office/drawing/2014/main" id="{D3DCD1FF-DE4A-49E1-9506-5F986AD129E7}"/>
+                <a16:creationId xmlns:a16="http://schemas.microsoft.com/office/drawing/2014/main" id="{E5D79753-54D8-4B50-A25A-E4FE8A9D952B}"/>
               </a:ext>
             </a:extLst>
           </p:cNvPr>
@@ -10583,7 +10591,7 @@
           <p:cNvPr id="12" name="">
             <a:extLst xmlns:a="http://schemas.openxmlformats.org/drawingml/2006/main">
               <a:ext uri="{FF2B5EF4-FFF2-40B4-BE49-F238E27FC236}">
-                <a16:creationId xmlns:a16="http://schemas.microsoft.com/office/drawing/2014/main" id="{88411961-108B-4938-BEF5-9ED3410A5F02}"/>
+                <a16:creationId xmlns:a16="http://schemas.microsoft.com/office/drawing/2014/main" id="{492A3A83-81B5-4108-8A48-D560A625C8C6}"/>
               </a:ext>
             </a:extLst>
           </p:cNvPr>
@@ -10640,7 +10648,7 @@
           <p:cNvPr id="13" name="">
             <a:extLst xmlns:a="http://schemas.openxmlformats.org/drawingml/2006/main">
               <a:ext uri="{FF2B5EF4-FFF2-40B4-BE49-F238E27FC236}">
-                <a16:creationId xmlns:a16="http://schemas.microsoft.com/office/drawing/2014/main" id="{9D6BA6F6-C3BD-403B-9338-091BA29CA921}"/>
+                <a16:creationId xmlns:a16="http://schemas.microsoft.com/office/drawing/2014/main" id="{FB76DF2E-8957-4EB9-B789-70B5A42A3824}"/>
               </a:ext>
             </a:extLst>
           </p:cNvPr>
@@ -10697,7 +10705,7 @@
           <p:cNvPr id="14" name="">
             <a:extLst xmlns:a="http://schemas.openxmlformats.org/drawingml/2006/main">
               <a:ext uri="{FF2B5EF4-FFF2-40B4-BE49-F238E27FC236}">
-                <a16:creationId xmlns:a16="http://schemas.microsoft.com/office/drawing/2014/main" id="{678FFF87-5592-463B-AADB-A150DB34B610}"/>
+                <a16:creationId xmlns:a16="http://schemas.microsoft.com/office/drawing/2014/main" id="{583B2405-5932-4AAC-9529-F7889BCB59E0}"/>
               </a:ext>
             </a:extLst>
           </p:cNvPr>
@@ -10754,7 +10762,7 @@
           <p:cNvPr id="15" name="">
             <a:extLst xmlns:a="http://schemas.openxmlformats.org/drawingml/2006/main">
               <a:ext uri="{FF2B5EF4-FFF2-40B4-BE49-F238E27FC236}">
-                <a16:creationId xmlns:a16="http://schemas.microsoft.com/office/drawing/2014/main" id="{A65A194A-1C01-4269-8CDC-887329479EC3}"/>
+                <a16:creationId xmlns:a16="http://schemas.microsoft.com/office/drawing/2014/main" id="{4B516DF4-4622-403B-B33E-8C46ACD25F2B}"/>
               </a:ext>
             </a:extLst>
           </p:cNvPr>
@@ -10809,7 +10817,7 @@
     </p:spTree>
     <p:extLst>
       <p:ext uri="{BB962C8B-B14F-4D97-AF65-F5344CB8AC3E}">
-        <p14:creationId xmlns:p14="http://schemas.microsoft.com/office/powerpoint/2010/main" val="1634652776"/>
+        <p14:creationId xmlns:p14="http://schemas.microsoft.com/office/powerpoint/2010/main" val="81830308"/>
       </p:ext>
     </p:extLst>
   </p:cSld>
@@ -10964,7 +10972,7 @@
           <p:cNvPr id="16" name="">
             <a:extLst xmlns:a="http://schemas.openxmlformats.org/drawingml/2006/main">
               <a:ext uri="{FF2B5EF4-FFF2-40B4-BE49-F238E27FC236}">
-                <a16:creationId xmlns:a16="http://schemas.microsoft.com/office/drawing/2014/main" id="{99E92375-203F-47A6-8111-DCCB32BEDEFF}"/>
+                <a16:creationId xmlns:a16="http://schemas.microsoft.com/office/drawing/2014/main" id="{CA460F9C-C7A7-44AC-94F2-87A9E313879E}"/>
               </a:ext>
             </a:extLst>
           </p:cNvPr>
@@ -10996,7 +11004,7 @@
           <p:cNvPr id="2" name="">
             <a:extLst xmlns:a="http://schemas.openxmlformats.org/drawingml/2006/main">
               <a:ext uri="{FF2B5EF4-FFF2-40B4-BE49-F238E27FC236}">
-                <a16:creationId xmlns:a16="http://schemas.microsoft.com/office/drawing/2014/main" id="{5F4EB93D-2DBB-4373-9CA1-321CCAC2011E}"/>
+                <a16:creationId xmlns:a16="http://schemas.microsoft.com/office/drawing/2014/main" id="{E6D7446F-FF7E-41C4-8E1C-0FEF15856E57}"/>
               </a:ext>
             </a:extLst>
           </p:cNvPr>
@@ -11053,7 +11061,7 @@
           <p:cNvPr id="3" name="">
             <a:extLst xmlns:a="http://schemas.openxmlformats.org/drawingml/2006/main">
               <a:ext uri="{FF2B5EF4-FFF2-40B4-BE49-F238E27FC236}">
-                <a16:creationId xmlns:a16="http://schemas.microsoft.com/office/drawing/2014/main" id="{75D7AE8F-A285-4216-A8CF-25E1990127AC}"/>
+                <a16:creationId xmlns:a16="http://schemas.microsoft.com/office/drawing/2014/main" id="{2590A56C-39C7-4ED3-AEC0-8AADCF544D24}"/>
               </a:ext>
             </a:extLst>
           </p:cNvPr>
@@ -11085,7 +11093,7 @@
           <p:cNvPr id="4" name="">
             <a:extLst xmlns:a="http://schemas.openxmlformats.org/drawingml/2006/main">
               <a:ext uri="{FF2B5EF4-FFF2-40B4-BE49-F238E27FC236}">
-                <a16:creationId xmlns:a16="http://schemas.microsoft.com/office/drawing/2014/main" id="{53193D05-77AB-491D-8343-E9A3E746CE5C}"/>
+                <a16:creationId xmlns:a16="http://schemas.microsoft.com/office/drawing/2014/main" id="{2AC145D1-59E6-4C93-ACFB-834FC7FE0C90}"/>
               </a:ext>
             </a:extLst>
           </p:cNvPr>
@@ -11142,7 +11150,7 @@
           <p:cNvPr id="5" name="">
             <a:extLst xmlns:a="http://schemas.openxmlformats.org/drawingml/2006/main">
               <a:ext uri="{FF2B5EF4-FFF2-40B4-BE49-F238E27FC236}">
-                <a16:creationId xmlns:a16="http://schemas.microsoft.com/office/drawing/2014/main" id="{B0117AA6-10BF-4EA8-8612-8D14DBE06EFA}"/>
+                <a16:creationId xmlns:a16="http://schemas.microsoft.com/office/drawing/2014/main" id="{AC59D243-1A90-4611-82E2-10C6F36E9554}"/>
               </a:ext>
             </a:extLst>
           </p:cNvPr>
@@ -11199,7 +11207,7 @@
           <p:cNvPr id="6" name="">
             <a:extLst xmlns:a="http://schemas.openxmlformats.org/drawingml/2006/main">
               <a:ext uri="{FF2B5EF4-FFF2-40B4-BE49-F238E27FC236}">
-                <a16:creationId xmlns:a16="http://schemas.microsoft.com/office/drawing/2014/main" id="{A7E7FBE4-5872-4341-BCAB-70A56F12C020}"/>
+                <a16:creationId xmlns:a16="http://schemas.microsoft.com/office/drawing/2014/main" id="{C2A27109-4D63-4A02-80CC-A93EC4196397}"/>
               </a:ext>
             </a:extLst>
           </p:cNvPr>
@@ -11256,7 +11264,7 @@
           <p:cNvPr id="7" name="">
             <a:extLst xmlns:a="http://schemas.openxmlformats.org/drawingml/2006/main">
               <a:ext uri="{FF2B5EF4-FFF2-40B4-BE49-F238E27FC236}">
-                <a16:creationId xmlns:a16="http://schemas.microsoft.com/office/drawing/2014/main" id="{570C6043-8BB7-47E1-A231-E6F84B923D78}"/>
+                <a16:creationId xmlns:a16="http://schemas.microsoft.com/office/drawing/2014/main" id="{947DE41A-1979-48B3-8C1B-511FD09B7B41}"/>
               </a:ext>
             </a:extLst>
           </p:cNvPr>
@@ -11288,7 +11296,7 @@
           <p:cNvPr id="8" name="">
             <a:extLst xmlns:a="http://schemas.openxmlformats.org/drawingml/2006/main">
               <a:ext uri="{FF2B5EF4-FFF2-40B4-BE49-F238E27FC236}">
-                <a16:creationId xmlns:a16="http://schemas.microsoft.com/office/drawing/2014/main" id="{0FF98CA5-7097-49C6-BFC9-468DBE97B2EA}"/>
+                <a16:creationId xmlns:a16="http://schemas.microsoft.com/office/drawing/2014/main" id="{69697DA1-7751-40BA-94ED-67D83604E47A}"/>
               </a:ext>
             </a:extLst>
           </p:cNvPr>
@@ -11345,7 +11353,7 @@
           <p:cNvPr id="9" name="">
             <a:extLst xmlns:a="http://schemas.openxmlformats.org/drawingml/2006/main">
               <a:ext uri="{FF2B5EF4-FFF2-40B4-BE49-F238E27FC236}">
-                <a16:creationId xmlns:a16="http://schemas.microsoft.com/office/drawing/2014/main" id="{FE5C8DC6-5241-4207-9EC6-F4548A5289FF}"/>
+                <a16:creationId xmlns:a16="http://schemas.microsoft.com/office/drawing/2014/main" id="{EC56FBEF-AE99-41FF-A179-44C0B87BBBDE}"/>
               </a:ext>
             </a:extLst>
           </p:cNvPr>
@@ -11406,7 +11414,7 @@
           <p:nvPr/>
         </p:nvPicPr>
         <p:blipFill>
-          <a:blip xmlns:r="http://schemas.openxmlformats.org/officeDocument/2006/relationships" xmlns:a="http://schemas.openxmlformats.org/drawingml/2006/main" r:embed="R928009977fa04fcb"/>
+          <a:blip xmlns:r="http://schemas.openxmlformats.org/officeDocument/2006/relationships" xmlns:a="http://schemas.openxmlformats.org/drawingml/2006/main" r:embed="Rcc0bbf8057544845"/>
           <a:stretch xmlns:a="http://schemas.openxmlformats.org/drawingml/2006/main"/>
         </p:blipFill>
         <p:spPr>
@@ -11424,7 +11432,7 @@
           <p:cNvPr id="11" name="">
             <a:extLst xmlns:a="http://schemas.openxmlformats.org/drawingml/2006/main">
               <a:ext uri="{FF2B5EF4-FFF2-40B4-BE49-F238E27FC236}">
-                <a16:creationId xmlns:a16="http://schemas.microsoft.com/office/drawing/2014/main" id="{845E53FC-CE54-4E4B-947E-0D42837B36E2}"/>
+                <a16:creationId xmlns:a16="http://schemas.microsoft.com/office/drawing/2014/main" id="{5845A718-ADB5-4A59-93D2-D327BAFA1B06}"/>
               </a:ext>
             </a:extLst>
           </p:cNvPr>
@@ -11481,7 +11489,7 @@
           <p:cNvPr id="12" name="">
             <a:extLst xmlns:a="http://schemas.openxmlformats.org/drawingml/2006/main">
               <a:ext uri="{FF2B5EF4-FFF2-40B4-BE49-F238E27FC236}">
-                <a16:creationId xmlns:a16="http://schemas.microsoft.com/office/drawing/2014/main" id="{D07E748E-0AA7-4A92-9D64-2A972DCD8B4B}"/>
+                <a16:creationId xmlns:a16="http://schemas.microsoft.com/office/drawing/2014/main" id="{6AA956A3-D7B4-4EBD-89C0-8946D8AA8913}"/>
               </a:ext>
             </a:extLst>
           </p:cNvPr>
@@ -11538,7 +11546,7 @@
           <p:cNvPr id="13" name="">
             <a:extLst xmlns:a="http://schemas.openxmlformats.org/drawingml/2006/main">
               <a:ext uri="{FF2B5EF4-FFF2-40B4-BE49-F238E27FC236}">
-                <a16:creationId xmlns:a16="http://schemas.microsoft.com/office/drawing/2014/main" id="{9BC4E318-9123-4287-B5C1-38411B783C5E}"/>
+                <a16:creationId xmlns:a16="http://schemas.microsoft.com/office/drawing/2014/main" id="{5C9CF5F3-9CA9-4BA0-8B4C-CD20293E56D8}"/>
               </a:ext>
             </a:extLst>
           </p:cNvPr>
@@ -11570,7 +11578,7 @@
           <p:cNvPr id="14" name="">
             <a:extLst xmlns:a="http://schemas.openxmlformats.org/drawingml/2006/main">
               <a:ext uri="{FF2B5EF4-FFF2-40B4-BE49-F238E27FC236}">
-                <a16:creationId xmlns:a16="http://schemas.microsoft.com/office/drawing/2014/main" id="{FDAA9787-10C2-4B76-A882-A284DE3272EA}"/>
+                <a16:creationId xmlns:a16="http://schemas.microsoft.com/office/drawing/2014/main" id="{0779159C-6176-4174-B71D-C33A5D47ABC6}"/>
               </a:ext>
             </a:extLst>
           </p:cNvPr>
@@ -11627,7 +11635,7 @@
           <p:cNvPr id="15" name="">
             <a:extLst xmlns:a="http://schemas.openxmlformats.org/drawingml/2006/main">
               <a:ext uri="{FF2B5EF4-FFF2-40B4-BE49-F238E27FC236}">
-                <a16:creationId xmlns:a16="http://schemas.microsoft.com/office/drawing/2014/main" id="{52FDB233-6326-4228-852B-2A65B15BE939}"/>
+                <a16:creationId xmlns:a16="http://schemas.microsoft.com/office/drawing/2014/main" id="{5835DF89-42FC-4043-A678-E2C017AC1D25}"/>
               </a:ext>
             </a:extLst>
           </p:cNvPr>
@@ -11682,7 +11690,7 @@
     </p:spTree>
     <p:extLst>
       <p:ext uri="{BB962C8B-B14F-4D97-AF65-F5344CB8AC3E}">
-        <p14:creationId xmlns:p14="http://schemas.microsoft.com/office/powerpoint/2010/main" val="1869195529"/>
+        <p14:creationId xmlns:p14="http://schemas.microsoft.com/office/powerpoint/2010/main" val="991684328"/>
       </p:ext>
     </p:extLst>
   </p:cSld>
@@ -11837,7 +11845,7 @@
           <p:cNvPr id="23" name="">
             <a:extLst xmlns:a="http://schemas.openxmlformats.org/drawingml/2006/main">
               <a:ext uri="{FF2B5EF4-FFF2-40B4-BE49-F238E27FC236}">
-                <a16:creationId xmlns:a16="http://schemas.microsoft.com/office/drawing/2014/main" id="{CA486CDB-1919-4470-9652-7288683B49C0}"/>
+                <a16:creationId xmlns:a16="http://schemas.microsoft.com/office/drawing/2014/main" id="{2A2115C7-F218-483E-8EBD-2E19CA0C57C9}"/>
               </a:ext>
             </a:extLst>
           </p:cNvPr>
@@ -11869,7 +11877,7 @@
           <p:cNvPr id="2" name="">
             <a:extLst xmlns:a="http://schemas.openxmlformats.org/drawingml/2006/main">
               <a:ext uri="{FF2B5EF4-FFF2-40B4-BE49-F238E27FC236}">
-                <a16:creationId xmlns:a16="http://schemas.microsoft.com/office/drawing/2014/main" id="{0BAF0531-E62E-4E16-BF76-A7F4296F2668}"/>
+                <a16:creationId xmlns:a16="http://schemas.microsoft.com/office/drawing/2014/main" id="{FB1C2A21-B9C0-4E21-8AC0-27FF8B20081B}"/>
               </a:ext>
             </a:extLst>
           </p:cNvPr>
@@ -11926,7 +11934,7 @@
           <p:cNvPr id="3" name="">
             <a:extLst xmlns:a="http://schemas.openxmlformats.org/drawingml/2006/main">
               <a:ext uri="{FF2B5EF4-FFF2-40B4-BE49-F238E27FC236}">
-                <a16:creationId xmlns:a16="http://schemas.microsoft.com/office/drawing/2014/main" id="{E3C28081-0CB1-4A63-8957-09C309005263}"/>
+                <a16:creationId xmlns:a16="http://schemas.microsoft.com/office/drawing/2014/main" id="{D00302F8-DB7D-49CE-8CB7-3EA54254203A}"/>
               </a:ext>
             </a:extLst>
           </p:cNvPr>
@@ -11958,7 +11966,7 @@
           <p:cNvPr id="4" name="">
             <a:extLst xmlns:a="http://schemas.openxmlformats.org/drawingml/2006/main">
               <a:ext uri="{FF2B5EF4-FFF2-40B4-BE49-F238E27FC236}">
-                <a16:creationId xmlns:a16="http://schemas.microsoft.com/office/drawing/2014/main" id="{349B4D27-0897-491A-8FBA-B52ED95A8285}"/>
+                <a16:creationId xmlns:a16="http://schemas.microsoft.com/office/drawing/2014/main" id="{FDBE3812-B0EE-4A54-B191-04D280D9A9A6}"/>
               </a:ext>
             </a:extLst>
           </p:cNvPr>
@@ -12015,7 +12023,7 @@
           <p:cNvPr id="5" name="">
             <a:extLst xmlns:a="http://schemas.openxmlformats.org/drawingml/2006/main">
               <a:ext uri="{FF2B5EF4-FFF2-40B4-BE49-F238E27FC236}">
-                <a16:creationId xmlns:a16="http://schemas.microsoft.com/office/drawing/2014/main" id="{B313DAED-84CF-41DD-A7CB-8A98C1C20998}"/>
+                <a16:creationId xmlns:a16="http://schemas.microsoft.com/office/drawing/2014/main" id="{B22CE874-6265-40A2-805E-8DF0C2363DF0}"/>
               </a:ext>
             </a:extLst>
           </p:cNvPr>
@@ -12072,7 +12080,7 @@
           <p:cNvPr id="6" name="">
             <a:extLst xmlns:a="http://schemas.openxmlformats.org/drawingml/2006/main">
               <a:ext uri="{FF2B5EF4-FFF2-40B4-BE49-F238E27FC236}">
-                <a16:creationId xmlns:a16="http://schemas.microsoft.com/office/drawing/2014/main" id="{E2A503F6-A19F-43CA-94DB-1123030F9306}"/>
+                <a16:creationId xmlns:a16="http://schemas.microsoft.com/office/drawing/2014/main" id="{E7DB52F5-F718-40F1-ACD1-1F4AC8EE4FFF}"/>
               </a:ext>
             </a:extLst>
           </p:cNvPr>
@@ -12129,7 +12137,7 @@
           <p:cNvPr id="7" name="">
             <a:extLst xmlns:a="http://schemas.openxmlformats.org/drawingml/2006/main">
               <a:ext uri="{FF2B5EF4-FFF2-40B4-BE49-F238E27FC236}">
-                <a16:creationId xmlns:a16="http://schemas.microsoft.com/office/drawing/2014/main" id="{60895082-4962-4A56-81D1-CCE4BE273DC0}"/>
+                <a16:creationId xmlns:a16="http://schemas.microsoft.com/office/drawing/2014/main" id="{C2EDEAFE-062F-4404-AD86-A734C4BF5344}"/>
               </a:ext>
             </a:extLst>
           </p:cNvPr>
@@ -12161,7 +12169,7 @@
           <p:cNvPr id="8" name="">
             <a:extLst xmlns:a="http://schemas.openxmlformats.org/drawingml/2006/main">
               <a:ext uri="{FF2B5EF4-FFF2-40B4-BE49-F238E27FC236}">
-                <a16:creationId xmlns:a16="http://schemas.microsoft.com/office/drawing/2014/main" id="{FEA63271-06D3-47F2-8C66-8FC6CC4D1A23}"/>
+                <a16:creationId xmlns:a16="http://schemas.microsoft.com/office/drawing/2014/main" id="{11AE66F4-B982-4596-AD24-40E55BA9634C}"/>
               </a:ext>
             </a:extLst>
           </p:cNvPr>
@@ -12218,7 +12226,7 @@
           <p:cNvPr id="9" name="">
             <a:extLst xmlns:a="http://schemas.openxmlformats.org/drawingml/2006/main">
               <a:ext uri="{FF2B5EF4-FFF2-40B4-BE49-F238E27FC236}">
-                <a16:creationId xmlns:a16="http://schemas.microsoft.com/office/drawing/2014/main" id="{1DE41BCB-6D0A-4A84-B801-D5F5E308E5FF}"/>
+                <a16:creationId xmlns:a16="http://schemas.microsoft.com/office/drawing/2014/main" id="{23AA8527-0B52-42B2-8A36-A9795FFB227A}"/>
               </a:ext>
             </a:extLst>
           </p:cNvPr>
@@ -12275,7 +12283,7 @@
           <p:cNvPr id="10" name="">
             <a:extLst xmlns:a="http://schemas.openxmlformats.org/drawingml/2006/main">
               <a:ext uri="{FF2B5EF4-FFF2-40B4-BE49-F238E27FC236}">
-                <a16:creationId xmlns:a16="http://schemas.microsoft.com/office/drawing/2014/main" id="{5E999CE9-0BF9-4CDC-BC9E-B127A4D79495}"/>
+                <a16:creationId xmlns:a16="http://schemas.microsoft.com/office/drawing/2014/main" id="{133BB98B-ED40-4C1F-B5CA-00EF4666938E}"/>
               </a:ext>
             </a:extLst>
           </p:cNvPr>
@@ -12309,7 +12317,7 @@
           <p:cNvPr id="11" name="">
             <a:extLst xmlns:a="http://schemas.openxmlformats.org/drawingml/2006/main">
               <a:ext uri="{FF2B5EF4-FFF2-40B4-BE49-F238E27FC236}">
-                <a16:creationId xmlns:a16="http://schemas.microsoft.com/office/drawing/2014/main" id="{1FF51FB1-9A76-4E34-91ED-641B5E01A13A}"/>
+                <a16:creationId xmlns:a16="http://schemas.microsoft.com/office/drawing/2014/main" id="{46C6270B-6640-4943-936C-B1987687B5E4}"/>
               </a:ext>
             </a:extLst>
           </p:cNvPr>
@@ -12341,7 +12349,7 @@
           <p:cNvPr id="12" name="">
             <a:extLst xmlns:a="http://schemas.openxmlformats.org/drawingml/2006/main">
               <a:ext uri="{FF2B5EF4-FFF2-40B4-BE49-F238E27FC236}">
-                <a16:creationId xmlns:a16="http://schemas.microsoft.com/office/drawing/2014/main" id="{B0E81D42-0265-4EC4-A962-2E022C1498A4}"/>
+                <a16:creationId xmlns:a16="http://schemas.microsoft.com/office/drawing/2014/main" id="{757955E8-CABD-4DD4-8F1F-60ED6F8FEBAF}"/>
               </a:ext>
             </a:extLst>
           </p:cNvPr>
@@ -12398,7 +12406,7 @@
           <p:cNvPr id="13" name="">
             <a:extLst xmlns:a="http://schemas.openxmlformats.org/drawingml/2006/main">
               <a:ext uri="{FF2B5EF4-FFF2-40B4-BE49-F238E27FC236}">
-                <a16:creationId xmlns:a16="http://schemas.microsoft.com/office/drawing/2014/main" id="{03573EBC-925E-44A5-ABC7-C751D83BD401}"/>
+                <a16:creationId xmlns:a16="http://schemas.microsoft.com/office/drawing/2014/main" id="{1D89FC32-9B38-40B8-9843-0816A3A96231}"/>
               </a:ext>
             </a:extLst>
           </p:cNvPr>
@@ -12455,7 +12463,7 @@
           <p:cNvPr id="14" name="">
             <a:extLst xmlns:a="http://schemas.openxmlformats.org/drawingml/2006/main">
               <a:ext uri="{FF2B5EF4-FFF2-40B4-BE49-F238E27FC236}">
-                <a16:creationId xmlns:a16="http://schemas.microsoft.com/office/drawing/2014/main" id="{96B4CA22-B155-4D1A-8CB9-87CAC35CD6E5}"/>
+                <a16:creationId xmlns:a16="http://schemas.microsoft.com/office/drawing/2014/main" id="{B28C365F-F816-4C21-A707-D3493F2E7A7D}"/>
               </a:ext>
             </a:extLst>
           </p:cNvPr>
@@ -12489,7 +12497,7 @@
           <p:cNvPr id="15" name="">
             <a:extLst xmlns:a="http://schemas.openxmlformats.org/drawingml/2006/main">
               <a:ext uri="{FF2B5EF4-FFF2-40B4-BE49-F238E27FC236}">
-                <a16:creationId xmlns:a16="http://schemas.microsoft.com/office/drawing/2014/main" id="{E47B1BC6-E677-4DB6-9D7C-7D2520C2DF2B}"/>
+                <a16:creationId xmlns:a16="http://schemas.microsoft.com/office/drawing/2014/main" id="{DF606763-10E5-4DCA-BB80-6FA0A7F94926}"/>
               </a:ext>
             </a:extLst>
           </p:cNvPr>
@@ -12521,7 +12529,7 @@
           <p:cNvPr id="16" name="">
             <a:extLst xmlns:a="http://schemas.openxmlformats.org/drawingml/2006/main">
               <a:ext uri="{FF2B5EF4-FFF2-40B4-BE49-F238E27FC236}">
-                <a16:creationId xmlns:a16="http://schemas.microsoft.com/office/drawing/2014/main" id="{7C0C71E8-0153-43F9-A6C9-A551EE8136E5}"/>
+                <a16:creationId xmlns:a16="http://schemas.microsoft.com/office/drawing/2014/main" id="{DCED5251-3499-417A-812C-6EA52D1920D1}"/>
               </a:ext>
             </a:extLst>
           </p:cNvPr>
@@ -12578,7 +12586,7 @@
           <p:cNvPr id="17" name="">
             <a:extLst xmlns:a="http://schemas.openxmlformats.org/drawingml/2006/main">
               <a:ext uri="{FF2B5EF4-FFF2-40B4-BE49-F238E27FC236}">
-                <a16:creationId xmlns:a16="http://schemas.microsoft.com/office/drawing/2014/main" id="{CBCF87F0-A384-4FB4-AA52-E12DF33D3249}"/>
+                <a16:creationId xmlns:a16="http://schemas.microsoft.com/office/drawing/2014/main" id="{64777087-43C9-43F8-808E-F9932B42DEE9}"/>
               </a:ext>
             </a:extLst>
           </p:cNvPr>
@@ -12635,7 +12643,7 @@
           <p:cNvPr id="18" name="">
             <a:extLst xmlns:a="http://schemas.openxmlformats.org/drawingml/2006/main">
               <a:ext uri="{FF2B5EF4-FFF2-40B4-BE49-F238E27FC236}">
-                <a16:creationId xmlns:a16="http://schemas.microsoft.com/office/drawing/2014/main" id="{94B9791C-10D3-4F68-897D-29F647966DE4}"/>
+                <a16:creationId xmlns:a16="http://schemas.microsoft.com/office/drawing/2014/main" id="{3573E41D-44DF-487A-8A56-CDC3F949E476}"/>
               </a:ext>
             </a:extLst>
           </p:cNvPr>
@@ -12669,7 +12677,7 @@
           <p:cNvPr id="19" name="">
             <a:extLst xmlns:a="http://schemas.openxmlformats.org/drawingml/2006/main">
               <a:ext uri="{FF2B5EF4-FFF2-40B4-BE49-F238E27FC236}">
-                <a16:creationId xmlns:a16="http://schemas.microsoft.com/office/drawing/2014/main" id="{E0E32B16-4F08-436C-8015-C8391F02BDD0}"/>
+                <a16:creationId xmlns:a16="http://schemas.microsoft.com/office/drawing/2014/main" id="{3FA855B2-96AF-47AC-A6D1-6894C1D869ED}"/>
               </a:ext>
             </a:extLst>
           </p:cNvPr>
@@ -12701,7 +12709,7 @@
           <p:cNvPr id="20" name="">
             <a:extLst xmlns:a="http://schemas.openxmlformats.org/drawingml/2006/main">
               <a:ext uri="{FF2B5EF4-FFF2-40B4-BE49-F238E27FC236}">
-                <a16:creationId xmlns:a16="http://schemas.microsoft.com/office/drawing/2014/main" id="{8A08910D-F65B-4F83-B665-EB052EE4B6D3}"/>
+                <a16:creationId xmlns:a16="http://schemas.microsoft.com/office/drawing/2014/main" id="{DA30B5EE-9925-4271-8DB0-C1ED1921A5C1}"/>
               </a:ext>
             </a:extLst>
           </p:cNvPr>
@@ -12758,7 +12766,7 @@
           <p:cNvPr id="21" name="">
             <a:extLst xmlns:a="http://schemas.openxmlformats.org/drawingml/2006/main">
               <a:ext uri="{FF2B5EF4-FFF2-40B4-BE49-F238E27FC236}">
-                <a16:creationId xmlns:a16="http://schemas.microsoft.com/office/drawing/2014/main" id="{A376132A-253B-46F4-A960-305C6BF16C6C}"/>
+                <a16:creationId xmlns:a16="http://schemas.microsoft.com/office/drawing/2014/main" id="{8CD45218-3267-4BE3-9B83-50C9293F280C}"/>
               </a:ext>
             </a:extLst>
           </p:cNvPr>
@@ -12815,7 +12823,7 @@
           <p:cNvPr id="22" name="">
             <a:extLst xmlns:a="http://schemas.openxmlformats.org/drawingml/2006/main">
               <a:ext uri="{FF2B5EF4-FFF2-40B4-BE49-F238E27FC236}">
-                <a16:creationId xmlns:a16="http://schemas.microsoft.com/office/drawing/2014/main" id="{50FB2E5F-C016-4E2C-835C-9E7155C05CEC}"/>
+                <a16:creationId xmlns:a16="http://schemas.microsoft.com/office/drawing/2014/main" id="{EDAC8A09-36A7-4D7E-BACF-06FA4865ABE1}"/>
               </a:ext>
             </a:extLst>
           </p:cNvPr>
@@ -12870,7 +12878,7 @@
     </p:spTree>
     <p:extLst>
       <p:ext uri="{BB962C8B-B14F-4D97-AF65-F5344CB8AC3E}">
-        <p14:creationId xmlns:p14="http://schemas.microsoft.com/office/powerpoint/2010/main" val="638334287"/>
+        <p14:creationId xmlns:p14="http://schemas.microsoft.com/office/powerpoint/2010/main" val="1517747146"/>
       </p:ext>
     </p:extLst>
   </p:cSld>
@@ -13071,7 +13079,7 @@
           <p:cNvPr id="22" name="">
             <a:extLst xmlns:a="http://schemas.openxmlformats.org/drawingml/2006/main">
               <a:ext uri="{FF2B5EF4-FFF2-40B4-BE49-F238E27FC236}">
-                <a16:creationId xmlns:a16="http://schemas.microsoft.com/office/drawing/2014/main" id="{0942E818-73BB-4FF6-9B11-53B84D2B6A0B}"/>
+                <a16:creationId xmlns:a16="http://schemas.microsoft.com/office/drawing/2014/main" id="{5FFDC32A-7244-4F40-9B5F-EEDEE155344C}"/>
               </a:ext>
             </a:extLst>
           </p:cNvPr>
@@ -13103,7 +13111,7 @@
           <p:cNvPr id="2" name="">
             <a:extLst xmlns:a="http://schemas.openxmlformats.org/drawingml/2006/main">
               <a:ext uri="{FF2B5EF4-FFF2-40B4-BE49-F238E27FC236}">
-                <a16:creationId xmlns:a16="http://schemas.microsoft.com/office/drawing/2014/main" id="{23C9D2A6-FE99-4D4D-AE2F-3D0FD8990611}"/>
+                <a16:creationId xmlns:a16="http://schemas.microsoft.com/office/drawing/2014/main" id="{03F5F323-BB30-40A7-AECB-CA0132E98910}"/>
               </a:ext>
             </a:extLst>
           </p:cNvPr>
@@ -13160,7 +13168,7 @@
           <p:cNvPr id="3" name="">
             <a:extLst xmlns:a="http://schemas.openxmlformats.org/drawingml/2006/main">
               <a:ext uri="{FF2B5EF4-FFF2-40B4-BE49-F238E27FC236}">
-                <a16:creationId xmlns:a16="http://schemas.microsoft.com/office/drawing/2014/main" id="{08043E2A-9660-4F25-AF51-444CA77B9A21}"/>
+                <a16:creationId xmlns:a16="http://schemas.microsoft.com/office/drawing/2014/main" id="{43AE7CB2-B236-4739-98DA-88C060B8B305}"/>
               </a:ext>
             </a:extLst>
           </p:cNvPr>
@@ -13192,7 +13200,7 @@
           <p:cNvPr id="4" name="">
             <a:extLst xmlns:a="http://schemas.openxmlformats.org/drawingml/2006/main">
               <a:ext uri="{FF2B5EF4-FFF2-40B4-BE49-F238E27FC236}">
-                <a16:creationId xmlns:a16="http://schemas.microsoft.com/office/drawing/2014/main" id="{97267539-7346-4432-ACB1-B12B51BB7CF7}"/>
+                <a16:creationId xmlns:a16="http://schemas.microsoft.com/office/drawing/2014/main" id="{C76D320F-E37F-47D1-A4CF-79BAEDC5B103}"/>
               </a:ext>
             </a:extLst>
           </p:cNvPr>
@@ -13249,7 +13257,7 @@
           <p:cNvPr id="5" name="">
             <a:extLst xmlns:a="http://schemas.openxmlformats.org/drawingml/2006/main">
               <a:ext uri="{FF2B5EF4-FFF2-40B4-BE49-F238E27FC236}">
-                <a16:creationId xmlns:a16="http://schemas.microsoft.com/office/drawing/2014/main" id="{0A0C65BB-3216-421B-924E-8647660B5810}"/>
+                <a16:creationId xmlns:a16="http://schemas.microsoft.com/office/drawing/2014/main" id="{1B133C06-D77F-4B86-B10C-E7BEB0C67AD8}"/>
               </a:ext>
             </a:extLst>
           </p:cNvPr>
@@ -13306,7 +13314,7 @@
           <p:cNvPr id="6" name="">
             <a:extLst xmlns:a="http://schemas.openxmlformats.org/drawingml/2006/main">
               <a:ext uri="{FF2B5EF4-FFF2-40B4-BE49-F238E27FC236}">
-                <a16:creationId xmlns:a16="http://schemas.microsoft.com/office/drawing/2014/main" id="{B3DA8EA9-6C7F-41DA-9CC7-F2AFF76EBD4E}"/>
+                <a16:creationId xmlns:a16="http://schemas.microsoft.com/office/drawing/2014/main" id="{7FF70F0B-B7C9-449C-8849-CF0F8F461E52}"/>
               </a:ext>
             </a:extLst>
           </p:cNvPr>
@@ -13363,7 +13371,7 @@
           <p:cNvPr id="7" name="">
             <a:extLst xmlns:a="http://schemas.openxmlformats.org/drawingml/2006/main">
               <a:ext uri="{FF2B5EF4-FFF2-40B4-BE49-F238E27FC236}">
-                <a16:creationId xmlns:a16="http://schemas.microsoft.com/office/drawing/2014/main" id="{A8051B0A-CF02-42DF-8B67-D63C727C70AB}"/>
+                <a16:creationId xmlns:a16="http://schemas.microsoft.com/office/drawing/2014/main" id="{12CE9846-6083-48AE-9D0D-BBBD8A1039A4}"/>
               </a:ext>
             </a:extLst>
           </p:cNvPr>
@@ -13395,7 +13403,7 @@
           <p:cNvPr id="8" name="">
             <a:extLst xmlns:a="http://schemas.openxmlformats.org/drawingml/2006/main">
               <a:ext uri="{FF2B5EF4-FFF2-40B4-BE49-F238E27FC236}">
-                <a16:creationId xmlns:a16="http://schemas.microsoft.com/office/drawing/2014/main" id="{92B4F65A-CFBA-4BEE-88C8-325B46AB974B}"/>
+                <a16:creationId xmlns:a16="http://schemas.microsoft.com/office/drawing/2014/main" id="{8D66135B-626C-45D4-BD4A-F8D0D24E7917}"/>
               </a:ext>
             </a:extLst>
           </p:cNvPr>
@@ -13452,7 +13460,7 @@
           <p:cNvPr id="9" name="">
             <a:extLst xmlns:a="http://schemas.openxmlformats.org/drawingml/2006/main">
               <a:ext uri="{FF2B5EF4-FFF2-40B4-BE49-F238E27FC236}">
-                <a16:creationId xmlns:a16="http://schemas.microsoft.com/office/drawing/2014/main" id="{9848724F-15A5-4AD4-A0E9-2286E22F0926}"/>
+                <a16:creationId xmlns:a16="http://schemas.microsoft.com/office/drawing/2014/main" id="{2B9E39A7-5630-4ED4-BE5E-01AFE734329B}"/>
               </a:ext>
             </a:extLst>
           </p:cNvPr>
@@ -13509,7 +13517,7 @@
           <p:cNvPr id="10" name="">
             <a:extLst xmlns:a="http://schemas.openxmlformats.org/drawingml/2006/main">
               <a:ext uri="{FF2B5EF4-FFF2-40B4-BE49-F238E27FC236}">
-                <a16:creationId xmlns:a16="http://schemas.microsoft.com/office/drawing/2014/main" id="{A35ECFA2-5671-4DEE-9604-BD66D2884FCE}"/>
+                <a16:creationId xmlns:a16="http://schemas.microsoft.com/office/drawing/2014/main" id="{111E0016-D148-4950-BF4A-880C42A3FF8D}"/>
               </a:ext>
             </a:extLst>
           </p:cNvPr>
@@ -13543,7 +13551,7 @@
           <p:cNvPr id="11" name="">
             <a:extLst xmlns:a="http://schemas.openxmlformats.org/drawingml/2006/main">
               <a:ext uri="{FF2B5EF4-FFF2-40B4-BE49-F238E27FC236}">
-                <a16:creationId xmlns:a16="http://schemas.microsoft.com/office/drawing/2014/main" id="{847FA7E2-F260-4FB2-88C5-B4DF4562C792}"/>
+                <a16:creationId xmlns:a16="http://schemas.microsoft.com/office/drawing/2014/main" id="{47B00FFD-E631-4AC5-A905-19442F8B9F90}"/>
               </a:ext>
             </a:extLst>
           </p:cNvPr>
@@ -13575,7 +13583,7 @@
           <p:cNvPr id="12" name="">
             <a:extLst xmlns:a="http://schemas.openxmlformats.org/drawingml/2006/main">
               <a:ext uri="{FF2B5EF4-FFF2-40B4-BE49-F238E27FC236}">
-                <a16:creationId xmlns:a16="http://schemas.microsoft.com/office/drawing/2014/main" id="{320E62A2-1045-4E3F-AFE8-B94E8FE54FA3}"/>
+                <a16:creationId xmlns:a16="http://schemas.microsoft.com/office/drawing/2014/main" id="{ECDC542D-F133-4947-B71E-EC5E7EDA7ADF}"/>
               </a:ext>
             </a:extLst>
           </p:cNvPr>
@@ -13632,7 +13640,7 @@
           <p:cNvPr id="13" name="">
             <a:extLst xmlns:a="http://schemas.openxmlformats.org/drawingml/2006/main">
               <a:ext uri="{FF2B5EF4-FFF2-40B4-BE49-F238E27FC236}">
-                <a16:creationId xmlns:a16="http://schemas.microsoft.com/office/drawing/2014/main" id="{424A2D68-1F2F-4E1C-A024-9993BF2B7DCA}"/>
+                <a16:creationId xmlns:a16="http://schemas.microsoft.com/office/drawing/2014/main" id="{61AD6C2A-D1DD-4E0E-981E-2BA70A10B3E4}"/>
               </a:ext>
             </a:extLst>
           </p:cNvPr>
@@ -13689,7 +13697,7 @@
           <p:cNvPr id="14" name="">
             <a:extLst xmlns:a="http://schemas.openxmlformats.org/drawingml/2006/main">
               <a:ext uri="{FF2B5EF4-FFF2-40B4-BE49-F238E27FC236}">
-                <a16:creationId xmlns:a16="http://schemas.microsoft.com/office/drawing/2014/main" id="{E160D996-FE7E-4657-9236-778FB9901C35}"/>
+                <a16:creationId xmlns:a16="http://schemas.microsoft.com/office/drawing/2014/main" id="{939390F5-3C59-4FD0-AA7B-9AA923D1D3DA}"/>
               </a:ext>
             </a:extLst>
           </p:cNvPr>
@@ -13723,7 +13731,7 @@
           <p:cNvPr id="15" name="">
             <a:extLst xmlns:a="http://schemas.openxmlformats.org/drawingml/2006/main">
               <a:ext uri="{FF2B5EF4-FFF2-40B4-BE49-F238E27FC236}">
-                <a16:creationId xmlns:a16="http://schemas.microsoft.com/office/drawing/2014/main" id="{53827015-DF23-4CAB-93A6-C70EED6F04F0}"/>
+                <a16:creationId xmlns:a16="http://schemas.microsoft.com/office/drawing/2014/main" id="{6B39A936-C39C-4871-8AAC-82519EF50D7D}"/>
               </a:ext>
             </a:extLst>
           </p:cNvPr>
@@ -13755,7 +13763,7 @@
           <p:cNvPr id="16" name="">
             <a:extLst xmlns:a="http://schemas.openxmlformats.org/drawingml/2006/main">
               <a:ext uri="{FF2B5EF4-FFF2-40B4-BE49-F238E27FC236}">
-                <a16:creationId xmlns:a16="http://schemas.microsoft.com/office/drawing/2014/main" id="{7964120E-A064-4E82-A54E-FDBFA8197454}"/>
+                <a16:creationId xmlns:a16="http://schemas.microsoft.com/office/drawing/2014/main" id="{661ECAB6-69F3-4BF3-B85D-A0165486DD5F}"/>
               </a:ext>
             </a:extLst>
           </p:cNvPr>
@@ -13812,7 +13820,7 @@
           <p:cNvPr id="17" name="">
             <a:extLst xmlns:a="http://schemas.openxmlformats.org/drawingml/2006/main">
               <a:ext uri="{FF2B5EF4-FFF2-40B4-BE49-F238E27FC236}">
-                <a16:creationId xmlns:a16="http://schemas.microsoft.com/office/drawing/2014/main" id="{52B8D0AC-81C3-441F-92CA-DF8D9DDD72A2}"/>
+                <a16:creationId xmlns:a16="http://schemas.microsoft.com/office/drawing/2014/main" id="{EC87065F-8442-414A-996F-E2A82911E60D}"/>
               </a:ext>
             </a:extLst>
           </p:cNvPr>
@@ -13869,7 +13877,7 @@
           <p:cNvPr id="18" name="">
             <a:extLst xmlns:a="http://schemas.openxmlformats.org/drawingml/2006/main">
               <a:ext uri="{FF2B5EF4-FFF2-40B4-BE49-F238E27FC236}">
-                <a16:creationId xmlns:a16="http://schemas.microsoft.com/office/drawing/2014/main" id="{B7B1D0D1-A695-4439-AD15-9946F308EA12}"/>
+                <a16:creationId xmlns:a16="http://schemas.microsoft.com/office/drawing/2014/main" id="{AB0F1595-D37C-4634-AC18-FA5E78928E89}"/>
               </a:ext>
             </a:extLst>
           </p:cNvPr>
@@ -13903,7 +13911,7 @@
           <p:cNvPr id="19" name="">
             <a:extLst xmlns:a="http://schemas.openxmlformats.org/drawingml/2006/main">
               <a:ext uri="{FF2B5EF4-FFF2-40B4-BE49-F238E27FC236}">
-                <a16:creationId xmlns:a16="http://schemas.microsoft.com/office/drawing/2014/main" id="{038814FC-BB3E-4A6B-B403-933187657CBC}"/>
+                <a16:creationId xmlns:a16="http://schemas.microsoft.com/office/drawing/2014/main" id="{683EA6D9-A3CD-4827-9C13-E2B68BA9CD40}"/>
               </a:ext>
             </a:extLst>
           </p:cNvPr>
@@ -13935,7 +13943,7 @@
           <p:cNvPr id="20" name="">
             <a:extLst xmlns:a="http://schemas.openxmlformats.org/drawingml/2006/main">
               <a:ext uri="{FF2B5EF4-FFF2-40B4-BE49-F238E27FC236}">
-                <a16:creationId xmlns:a16="http://schemas.microsoft.com/office/drawing/2014/main" id="{18B7C8E8-C8C1-4EA9-A9B0-66412B34C906}"/>
+                <a16:creationId xmlns:a16="http://schemas.microsoft.com/office/drawing/2014/main" id="{E42DE98E-7959-48A3-94D4-CF98555B9E38}"/>
               </a:ext>
             </a:extLst>
           </p:cNvPr>
@@ -13992,7 +14000,7 @@
           <p:cNvPr id="21" name="">
             <a:extLst xmlns:a="http://schemas.openxmlformats.org/drawingml/2006/main">
               <a:ext uri="{FF2B5EF4-FFF2-40B4-BE49-F238E27FC236}">
-                <a16:creationId xmlns:a16="http://schemas.microsoft.com/office/drawing/2014/main" id="{F1121F42-2811-4985-8233-5A1A10140F3F}"/>
+                <a16:creationId xmlns:a16="http://schemas.microsoft.com/office/drawing/2014/main" id="{4B28CDDB-8C13-4C4D-B6D7-B0446D533AA8}"/>
               </a:ext>
             </a:extLst>
           </p:cNvPr>
@@ -14047,7 +14055,7 @@
     </p:spTree>
     <p:extLst>
       <p:ext uri="{BB962C8B-B14F-4D97-AF65-F5344CB8AC3E}">
-        <p14:creationId xmlns:p14="http://schemas.microsoft.com/office/powerpoint/2010/main" val="519926190"/>
+        <p14:creationId xmlns:p14="http://schemas.microsoft.com/office/powerpoint/2010/main" val="1468010861"/>
       </p:ext>
     </p:extLst>
   </p:cSld>
